--- a/slides/method1_slope_report.pptx
+++ b/slides/method1_slope_report.pptx
@@ -5,22 +5,25 @@
     <p:sldMasterId id="2147483648" r:id="rId1"/>
   </p:sldMasterIdLst>
   <p:sldIdLst>
-    <p:sldId id="256" r:id="rId7"/>
-    <p:sldId id="257" r:id="rId8"/>
-    <p:sldId id="258" r:id="rId9"/>
-    <p:sldId id="259" r:id="rId10"/>
-    <p:sldId id="260" r:id="rId11"/>
-    <p:sldId id="261" r:id="rId12"/>
-    <p:sldId id="262" r:id="rId13"/>
-    <p:sldId id="263" r:id="rId14"/>
-    <p:sldId id="264" r:id="rId15"/>
-    <p:sldId id="265" r:id="rId16"/>
-    <p:sldId id="266" r:id="rId17"/>
-    <p:sldId id="267" r:id="rId18"/>
-    <p:sldId id="268" r:id="rId19"/>
-    <p:sldId id="269" r:id="rId20"/>
+    <p:sldId id="256" r:id="rId2"/>
+    <p:sldId id="257" r:id="rId3"/>
+    <p:sldId id="258" r:id="rId4"/>
+    <p:sldId id="259" r:id="rId5"/>
+    <p:sldId id="260" r:id="rId6"/>
+    <p:sldId id="261" r:id="rId7"/>
+    <p:sldId id="262" r:id="rId8"/>
+    <p:sldId id="263" r:id="rId9"/>
+    <p:sldId id="264" r:id="rId10"/>
+    <p:sldId id="265" r:id="rId11"/>
+    <p:sldId id="266" r:id="rId12"/>
+    <p:sldId id="267" r:id="rId13"/>
+    <p:sldId id="268" r:id="rId14"/>
+    <p:sldId id="269" r:id="rId15"/>
+    <p:sldId id="270" r:id="rId16"/>
+    <p:sldId id="271" r:id="rId17"/>
+    <p:sldId id="272" r:id="rId18"/>
   </p:sldIdLst>
-  <p:sldSz cx="12191695" cy="6858000" type="screen4x3"/>
+  <p:sldSz cx="12192000" cy="6858000"/>
   <p:notesSz cx="6858000" cy="9144000"/>
   <p:defaultTextStyle>
     <a:defPPr>
@@ -117,6 +120,22 @@
       </a:defRPr>
     </a:lvl9pPr>
   </p:defaultTextStyle>
+  <p:extLst>
+    <p:ext uri="{EFAFB233-063F-42B5-8137-9DF3F51BA10A}">
+      <p15:sldGuideLst xmlns:p15="http://schemas.microsoft.com/office/powerpoint/2012/main">
+        <p15:guide id="1" orient="horz" pos="2160">
+          <p15:clr>
+            <a:srgbClr val="A4A3A4"/>
+          </p15:clr>
+        </p15:guide>
+        <p15:guide id="2" pos="2880">
+          <p15:clr>
+            <a:srgbClr val="A4A3A4"/>
+          </p15:clr>
+        </p15:guide>
+      </p15:sldGuideLst>
+    </p:ext>
+  </p:extLst>
 </p:presentation>
 </file>
 
@@ -158,10 +177,9 @@
           <a:lstStyle/>
           <a:p>
             <a:r>
-              <a:rPr lang="en-US" smtClean="0"/>
+              <a:rPr lang="en-US"/>
               <a:t>Click to edit Master title style</a:t>
             </a:r>
-            <a:endParaRPr lang="en-US"/>
           </a:p>
         </p:txBody>
       </p:sp>
@@ -277,10 +295,9 @@
           </a:lstStyle>
           <a:p>
             <a:r>
-              <a:rPr lang="en-US" smtClean="0"/>
+              <a:rPr lang="en-US"/>
               <a:t>Click to edit Master subtitle style</a:t>
             </a:r>
-            <a:endParaRPr lang="en-US"/>
           </a:p>
         </p:txBody>
       </p:sp>
@@ -301,7 +318,7 @@
           <a:p>
             <a:fld id="{5BCAD085-E8A6-8845-BD4E-CB4CCA059FC4}" type="datetimeFigureOut">
               <a:rPr lang="en-US" smtClean="0"/>
-              <a:t>1/27/13</a:t>
+              <a:t>6/25/26</a:t>
             </a:fld>
             <a:endParaRPr lang="en-US"/>
           </a:p>
@@ -395,10 +412,9 @@
           <a:lstStyle/>
           <a:p>
             <a:r>
-              <a:rPr lang="en-US" smtClean="0"/>
+              <a:rPr lang="en-US"/>
               <a:t>Click to edit Master title style</a:t>
             </a:r>
-            <a:endParaRPr lang="en-US"/>
           </a:p>
         </p:txBody>
       </p:sp>
@@ -419,38 +435,37 @@
           <a:p>
             <a:pPr lvl="0"/>
             <a:r>
-              <a:rPr lang="en-US" smtClean="0"/>
+              <a:rPr lang="en-US"/>
               <a:t>Click to edit Master text styles</a:t>
             </a:r>
           </a:p>
           <a:p>
             <a:pPr lvl="1"/>
             <a:r>
-              <a:rPr lang="en-US" smtClean="0"/>
+              <a:rPr lang="en-US"/>
               <a:t>Second level</a:t>
             </a:r>
           </a:p>
           <a:p>
             <a:pPr lvl="2"/>
             <a:r>
-              <a:rPr lang="en-US" smtClean="0"/>
+              <a:rPr lang="en-US"/>
               <a:t>Third level</a:t>
             </a:r>
           </a:p>
           <a:p>
             <a:pPr lvl="3"/>
             <a:r>
-              <a:rPr lang="en-US" smtClean="0"/>
+              <a:rPr lang="en-US"/>
               <a:t>Fourth level</a:t>
             </a:r>
           </a:p>
           <a:p>
             <a:pPr lvl="4"/>
             <a:r>
-              <a:rPr lang="en-US" smtClean="0"/>
+              <a:rPr lang="en-US"/>
               <a:t>Fifth level</a:t>
             </a:r>
-            <a:endParaRPr lang="en-US"/>
           </a:p>
         </p:txBody>
       </p:sp>
@@ -471,7 +486,7 @@
           <a:p>
             <a:fld id="{5BCAD085-E8A6-8845-BD4E-CB4CCA059FC4}" type="datetimeFigureOut">
               <a:rPr lang="en-US" smtClean="0"/>
-              <a:t>1/27/13</a:t>
+              <a:t>6/25/26</a:t>
             </a:fld>
             <a:endParaRPr lang="en-US"/>
           </a:p>
@@ -570,10 +585,9 @@
           <a:lstStyle/>
           <a:p>
             <a:r>
-              <a:rPr lang="en-US" smtClean="0"/>
+              <a:rPr lang="en-US"/>
               <a:t>Click to edit Master title style</a:t>
             </a:r>
-            <a:endParaRPr lang="en-US"/>
           </a:p>
         </p:txBody>
       </p:sp>
@@ -599,38 +613,37 @@
           <a:p>
             <a:pPr lvl="0"/>
             <a:r>
-              <a:rPr lang="en-US" smtClean="0"/>
+              <a:rPr lang="en-US"/>
               <a:t>Click to edit Master text styles</a:t>
             </a:r>
           </a:p>
           <a:p>
             <a:pPr lvl="1"/>
             <a:r>
-              <a:rPr lang="en-US" smtClean="0"/>
+              <a:rPr lang="en-US"/>
               <a:t>Second level</a:t>
             </a:r>
           </a:p>
           <a:p>
             <a:pPr lvl="2"/>
             <a:r>
-              <a:rPr lang="en-US" smtClean="0"/>
+              <a:rPr lang="en-US"/>
               <a:t>Third level</a:t>
             </a:r>
           </a:p>
           <a:p>
             <a:pPr lvl="3"/>
             <a:r>
-              <a:rPr lang="en-US" smtClean="0"/>
+              <a:rPr lang="en-US"/>
               <a:t>Fourth level</a:t>
             </a:r>
           </a:p>
           <a:p>
             <a:pPr lvl="4"/>
             <a:r>
-              <a:rPr lang="en-US" smtClean="0"/>
+              <a:rPr lang="en-US"/>
               <a:t>Fifth level</a:t>
             </a:r>
-            <a:endParaRPr lang="en-US"/>
           </a:p>
         </p:txBody>
       </p:sp>
@@ -651,7 +664,7 @@
           <a:p>
             <a:fld id="{5BCAD085-E8A6-8845-BD4E-CB4CCA059FC4}" type="datetimeFigureOut">
               <a:rPr lang="en-US" smtClean="0"/>
-              <a:t>1/27/13</a:t>
+              <a:t>6/25/26</a:t>
             </a:fld>
             <a:endParaRPr lang="en-US"/>
           </a:p>
@@ -745,10 +758,9 @@
           <a:lstStyle/>
           <a:p>
             <a:r>
-              <a:rPr lang="en-US" smtClean="0"/>
+              <a:rPr lang="en-US"/>
               <a:t>Click to edit Master title style</a:t>
             </a:r>
-            <a:endParaRPr lang="en-US"/>
           </a:p>
         </p:txBody>
       </p:sp>
@@ -769,38 +781,37 @@
           <a:p>
             <a:pPr lvl="0"/>
             <a:r>
-              <a:rPr lang="en-US" smtClean="0"/>
+              <a:rPr lang="en-US"/>
               <a:t>Click to edit Master text styles</a:t>
             </a:r>
           </a:p>
           <a:p>
             <a:pPr lvl="1"/>
             <a:r>
-              <a:rPr lang="en-US" smtClean="0"/>
+              <a:rPr lang="en-US"/>
               <a:t>Second level</a:t>
             </a:r>
           </a:p>
           <a:p>
             <a:pPr lvl="2"/>
             <a:r>
-              <a:rPr lang="en-US" smtClean="0"/>
+              <a:rPr lang="en-US"/>
               <a:t>Third level</a:t>
             </a:r>
           </a:p>
           <a:p>
             <a:pPr lvl="3"/>
             <a:r>
-              <a:rPr lang="en-US" smtClean="0"/>
+              <a:rPr lang="en-US"/>
               <a:t>Fourth level</a:t>
             </a:r>
           </a:p>
           <a:p>
             <a:pPr lvl="4"/>
             <a:r>
-              <a:rPr lang="en-US" smtClean="0"/>
+              <a:rPr lang="en-US"/>
               <a:t>Fifth level</a:t>
             </a:r>
-            <a:endParaRPr lang="en-US"/>
           </a:p>
         </p:txBody>
       </p:sp>
@@ -821,7 +832,7 @@
           <a:p>
             <a:fld id="{5BCAD085-E8A6-8845-BD4E-CB4CCA059FC4}" type="datetimeFigureOut">
               <a:rPr lang="en-US" smtClean="0"/>
-              <a:t>1/27/13</a:t>
+              <a:t>6/25/26</a:t>
             </a:fld>
             <a:endParaRPr lang="en-US"/>
           </a:p>
@@ -924,10 +935,9 @@
           </a:lstStyle>
           <a:p>
             <a:r>
-              <a:rPr lang="en-US" smtClean="0"/>
+              <a:rPr lang="en-US"/>
               <a:t>Click to edit Master title style</a:t>
             </a:r>
-            <a:endParaRPr lang="en-US"/>
           </a:p>
         </p:txBody>
       </p:sp>
@@ -1044,7 +1054,7 @@
           <a:p>
             <a:pPr lvl="0"/>
             <a:r>
-              <a:rPr lang="en-US" smtClean="0"/>
+              <a:rPr lang="en-US"/>
               <a:t>Click to edit Master text styles</a:t>
             </a:r>
           </a:p>
@@ -1067,7 +1077,7 @@
           <a:p>
             <a:fld id="{5BCAD085-E8A6-8845-BD4E-CB4CCA059FC4}" type="datetimeFigureOut">
               <a:rPr lang="en-US" smtClean="0"/>
-              <a:t>1/27/13</a:t>
+              <a:t>6/25/26</a:t>
             </a:fld>
             <a:endParaRPr lang="en-US"/>
           </a:p>
@@ -1161,10 +1171,9 @@
           <a:lstStyle/>
           <a:p>
             <a:r>
-              <a:rPr lang="en-US" smtClean="0"/>
+              <a:rPr lang="en-US"/>
               <a:t>Click to edit Master title style</a:t>
             </a:r>
-            <a:endParaRPr lang="en-US"/>
           </a:p>
         </p:txBody>
       </p:sp>
@@ -1218,38 +1227,37 @@
           <a:p>
             <a:pPr lvl="0"/>
             <a:r>
-              <a:rPr lang="en-US" smtClean="0"/>
+              <a:rPr lang="en-US"/>
               <a:t>Click to edit Master text styles</a:t>
             </a:r>
           </a:p>
           <a:p>
             <a:pPr lvl="1"/>
             <a:r>
-              <a:rPr lang="en-US" smtClean="0"/>
+              <a:rPr lang="en-US"/>
               <a:t>Second level</a:t>
             </a:r>
           </a:p>
           <a:p>
             <a:pPr lvl="2"/>
             <a:r>
-              <a:rPr lang="en-US" smtClean="0"/>
+              <a:rPr lang="en-US"/>
               <a:t>Third level</a:t>
             </a:r>
           </a:p>
           <a:p>
             <a:pPr lvl="3"/>
             <a:r>
-              <a:rPr lang="en-US" smtClean="0"/>
+              <a:rPr lang="en-US"/>
               <a:t>Fourth level</a:t>
             </a:r>
           </a:p>
           <a:p>
             <a:pPr lvl="4"/>
             <a:r>
-              <a:rPr lang="en-US" smtClean="0"/>
+              <a:rPr lang="en-US"/>
               <a:t>Fifth level</a:t>
             </a:r>
-            <a:endParaRPr lang="en-US"/>
           </a:p>
         </p:txBody>
       </p:sp>
@@ -1303,38 +1311,37 @@
           <a:p>
             <a:pPr lvl="0"/>
             <a:r>
-              <a:rPr lang="en-US" smtClean="0"/>
+              <a:rPr lang="en-US"/>
               <a:t>Click to edit Master text styles</a:t>
             </a:r>
           </a:p>
           <a:p>
             <a:pPr lvl="1"/>
             <a:r>
-              <a:rPr lang="en-US" smtClean="0"/>
+              <a:rPr lang="en-US"/>
               <a:t>Second level</a:t>
             </a:r>
           </a:p>
           <a:p>
             <a:pPr lvl="2"/>
             <a:r>
-              <a:rPr lang="en-US" smtClean="0"/>
+              <a:rPr lang="en-US"/>
               <a:t>Third level</a:t>
             </a:r>
           </a:p>
           <a:p>
             <a:pPr lvl="3"/>
             <a:r>
-              <a:rPr lang="en-US" smtClean="0"/>
+              <a:rPr lang="en-US"/>
               <a:t>Fourth level</a:t>
             </a:r>
           </a:p>
           <a:p>
             <a:pPr lvl="4"/>
             <a:r>
-              <a:rPr lang="en-US" smtClean="0"/>
+              <a:rPr lang="en-US"/>
               <a:t>Fifth level</a:t>
             </a:r>
-            <a:endParaRPr lang="en-US"/>
           </a:p>
         </p:txBody>
       </p:sp>
@@ -1355,7 +1362,7 @@
           <a:p>
             <a:fld id="{5BCAD085-E8A6-8845-BD4E-CB4CCA059FC4}" type="datetimeFigureOut">
               <a:rPr lang="en-US" smtClean="0"/>
-              <a:t>1/27/13</a:t>
+              <a:t>6/25/26</a:t>
             </a:fld>
             <a:endParaRPr lang="en-US"/>
           </a:p>
@@ -1453,10 +1460,9 @@
           </a:lstStyle>
           <a:p>
             <a:r>
-              <a:rPr lang="en-US" smtClean="0"/>
+              <a:rPr lang="en-US"/>
               <a:t>Click to edit Master title style</a:t>
             </a:r>
-            <a:endParaRPr lang="en-US"/>
           </a:p>
         </p:txBody>
       </p:sp>
@@ -1519,7 +1525,7 @@
           <a:p>
             <a:pPr lvl="0"/>
             <a:r>
-              <a:rPr lang="en-US" smtClean="0"/>
+              <a:rPr lang="en-US"/>
               <a:t>Click to edit Master text styles</a:t>
             </a:r>
           </a:p>
@@ -1575,38 +1581,37 @@
           <a:p>
             <a:pPr lvl="0"/>
             <a:r>
-              <a:rPr lang="en-US" smtClean="0"/>
+              <a:rPr lang="en-US"/>
               <a:t>Click to edit Master text styles</a:t>
             </a:r>
           </a:p>
           <a:p>
             <a:pPr lvl="1"/>
             <a:r>
-              <a:rPr lang="en-US" smtClean="0"/>
+              <a:rPr lang="en-US"/>
               <a:t>Second level</a:t>
             </a:r>
           </a:p>
           <a:p>
             <a:pPr lvl="2"/>
             <a:r>
-              <a:rPr lang="en-US" smtClean="0"/>
+              <a:rPr lang="en-US"/>
               <a:t>Third level</a:t>
             </a:r>
           </a:p>
           <a:p>
             <a:pPr lvl="3"/>
             <a:r>
-              <a:rPr lang="en-US" smtClean="0"/>
+              <a:rPr lang="en-US"/>
               <a:t>Fourth level</a:t>
             </a:r>
           </a:p>
           <a:p>
             <a:pPr lvl="4"/>
             <a:r>
-              <a:rPr lang="en-US" smtClean="0"/>
+              <a:rPr lang="en-US"/>
               <a:t>Fifth level</a:t>
             </a:r>
-            <a:endParaRPr lang="en-US"/>
           </a:p>
         </p:txBody>
       </p:sp>
@@ -1669,7 +1674,7 @@
           <a:p>
             <a:pPr lvl="0"/>
             <a:r>
-              <a:rPr lang="en-US" smtClean="0"/>
+              <a:rPr lang="en-US"/>
               <a:t>Click to edit Master text styles</a:t>
             </a:r>
           </a:p>
@@ -1725,38 +1730,37 @@
           <a:p>
             <a:pPr lvl="0"/>
             <a:r>
-              <a:rPr lang="en-US" smtClean="0"/>
+              <a:rPr lang="en-US"/>
               <a:t>Click to edit Master text styles</a:t>
             </a:r>
           </a:p>
           <a:p>
             <a:pPr lvl="1"/>
             <a:r>
-              <a:rPr lang="en-US" smtClean="0"/>
+              <a:rPr lang="en-US"/>
               <a:t>Second level</a:t>
             </a:r>
           </a:p>
           <a:p>
             <a:pPr lvl="2"/>
             <a:r>
-              <a:rPr lang="en-US" smtClean="0"/>
+              <a:rPr lang="en-US"/>
               <a:t>Third level</a:t>
             </a:r>
           </a:p>
           <a:p>
             <a:pPr lvl="3"/>
             <a:r>
-              <a:rPr lang="en-US" smtClean="0"/>
+              <a:rPr lang="en-US"/>
               <a:t>Fourth level</a:t>
             </a:r>
           </a:p>
           <a:p>
             <a:pPr lvl="4"/>
             <a:r>
-              <a:rPr lang="en-US" smtClean="0"/>
+              <a:rPr lang="en-US"/>
               <a:t>Fifth level</a:t>
             </a:r>
-            <a:endParaRPr lang="en-US"/>
           </a:p>
         </p:txBody>
       </p:sp>
@@ -1777,7 +1781,7 @@
           <a:p>
             <a:fld id="{5BCAD085-E8A6-8845-BD4E-CB4CCA059FC4}" type="datetimeFigureOut">
               <a:rPr lang="en-US" smtClean="0"/>
-              <a:t>1/27/13</a:t>
+              <a:t>6/25/26</a:t>
             </a:fld>
             <a:endParaRPr lang="en-US"/>
           </a:p>
@@ -1871,10 +1875,9 @@
           <a:lstStyle/>
           <a:p>
             <a:r>
-              <a:rPr lang="en-US" smtClean="0"/>
+              <a:rPr lang="en-US"/>
               <a:t>Click to edit Master title style</a:t>
             </a:r>
-            <a:endParaRPr lang="en-US"/>
           </a:p>
         </p:txBody>
       </p:sp>
@@ -1895,7 +1898,7 @@
           <a:p>
             <a:fld id="{5BCAD085-E8A6-8845-BD4E-CB4CCA059FC4}" type="datetimeFigureOut">
               <a:rPr lang="en-US" smtClean="0"/>
-              <a:t>1/27/13</a:t>
+              <a:t>6/25/26</a:t>
             </a:fld>
             <a:endParaRPr lang="en-US"/>
           </a:p>
@@ -1990,7 +1993,7 @@
           <a:p>
             <a:fld id="{5BCAD085-E8A6-8845-BD4E-CB4CCA059FC4}" type="datetimeFigureOut">
               <a:rPr lang="en-US" smtClean="0"/>
-              <a:t>1/27/13</a:t>
+              <a:t>6/25/26</a:t>
             </a:fld>
             <a:endParaRPr lang="en-US"/>
           </a:p>
@@ -2093,10 +2096,9 @@
           </a:lstStyle>
           <a:p>
             <a:r>
-              <a:rPr lang="en-US" smtClean="0"/>
+              <a:rPr lang="en-US"/>
               <a:t>Click to edit Master title style</a:t>
             </a:r>
-            <a:endParaRPr lang="en-US"/>
           </a:p>
         </p:txBody>
       </p:sp>
@@ -2150,38 +2152,37 @@
           <a:p>
             <a:pPr lvl="0"/>
             <a:r>
-              <a:rPr lang="en-US" smtClean="0"/>
+              <a:rPr lang="en-US"/>
               <a:t>Click to edit Master text styles</a:t>
             </a:r>
           </a:p>
           <a:p>
             <a:pPr lvl="1"/>
             <a:r>
-              <a:rPr lang="en-US" smtClean="0"/>
+              <a:rPr lang="en-US"/>
               <a:t>Second level</a:t>
             </a:r>
           </a:p>
           <a:p>
             <a:pPr lvl="2"/>
             <a:r>
-              <a:rPr lang="en-US" smtClean="0"/>
+              <a:rPr lang="en-US"/>
               <a:t>Third level</a:t>
             </a:r>
           </a:p>
           <a:p>
             <a:pPr lvl="3"/>
             <a:r>
-              <a:rPr lang="en-US" smtClean="0"/>
+              <a:rPr lang="en-US"/>
               <a:t>Fourth level</a:t>
             </a:r>
           </a:p>
           <a:p>
             <a:pPr lvl="4"/>
             <a:r>
-              <a:rPr lang="en-US" smtClean="0"/>
+              <a:rPr lang="en-US"/>
               <a:t>Fifth level</a:t>
             </a:r>
-            <a:endParaRPr lang="en-US"/>
           </a:p>
         </p:txBody>
       </p:sp>
@@ -2244,7 +2245,7 @@
           <a:p>
             <a:pPr lvl="0"/>
             <a:r>
-              <a:rPr lang="en-US" smtClean="0"/>
+              <a:rPr lang="en-US"/>
               <a:t>Click to edit Master text styles</a:t>
             </a:r>
           </a:p>
@@ -2267,7 +2268,7 @@
           <a:p>
             <a:fld id="{5BCAD085-E8A6-8845-BD4E-CB4CCA059FC4}" type="datetimeFigureOut">
               <a:rPr lang="en-US" smtClean="0"/>
-              <a:t>1/27/13</a:t>
+              <a:t>6/25/26</a:t>
             </a:fld>
             <a:endParaRPr lang="en-US"/>
           </a:p>
@@ -2370,10 +2371,9 @@
           </a:lstStyle>
           <a:p>
             <a:r>
-              <a:rPr lang="en-US" smtClean="0"/>
+              <a:rPr lang="en-US"/>
               <a:t>Click to edit Master title style</a:t>
             </a:r>
-            <a:endParaRPr lang="en-US"/>
           </a:p>
         </p:txBody>
       </p:sp>
@@ -2497,7 +2497,7 @@
           <a:p>
             <a:pPr lvl="0"/>
             <a:r>
-              <a:rPr lang="en-US" smtClean="0"/>
+              <a:rPr lang="en-US"/>
               <a:t>Click to edit Master text styles</a:t>
             </a:r>
           </a:p>
@@ -2520,7 +2520,7 @@
           <a:p>
             <a:fld id="{5BCAD085-E8A6-8845-BD4E-CB4CCA059FC4}" type="datetimeFigureOut">
               <a:rPr lang="en-US" smtClean="0"/>
-              <a:t>1/27/13</a:t>
+              <a:t>6/25/26</a:t>
             </a:fld>
             <a:endParaRPr lang="en-US"/>
           </a:p>
@@ -2629,10 +2629,9 @@
           <a:lstStyle/>
           <a:p>
             <a:r>
-              <a:rPr lang="en-US" smtClean="0"/>
+              <a:rPr lang="en-US"/>
               <a:t>Click to edit Master title style</a:t>
             </a:r>
-            <a:endParaRPr lang="en-US"/>
           </a:p>
         </p:txBody>
       </p:sp>
@@ -2663,38 +2662,37 @@
           <a:p>
             <a:pPr lvl="0"/>
             <a:r>
-              <a:rPr lang="en-US" smtClean="0"/>
+              <a:rPr lang="en-US"/>
               <a:t>Click to edit Master text styles</a:t>
             </a:r>
           </a:p>
           <a:p>
             <a:pPr lvl="1"/>
             <a:r>
-              <a:rPr lang="en-US" smtClean="0"/>
+              <a:rPr lang="en-US"/>
               <a:t>Second level</a:t>
             </a:r>
           </a:p>
           <a:p>
             <a:pPr lvl="2"/>
             <a:r>
-              <a:rPr lang="en-US" smtClean="0"/>
+              <a:rPr lang="en-US"/>
               <a:t>Third level</a:t>
             </a:r>
           </a:p>
           <a:p>
             <a:pPr lvl="3"/>
             <a:r>
-              <a:rPr lang="en-US" smtClean="0"/>
+              <a:rPr lang="en-US"/>
               <a:t>Fourth level</a:t>
             </a:r>
           </a:p>
           <a:p>
             <a:pPr lvl="4"/>
             <a:r>
-              <a:rPr lang="en-US" smtClean="0"/>
+              <a:rPr lang="en-US"/>
               <a:t>Fifth level</a:t>
             </a:r>
-            <a:endParaRPr lang="en-US"/>
           </a:p>
         </p:txBody>
       </p:sp>
@@ -2733,7 +2731,7 @@
           <a:p>
             <a:fld id="{5BCAD085-E8A6-8845-BD4E-CB4CCA059FC4}" type="datetimeFigureOut">
               <a:rPr lang="en-US" smtClean="0"/>
-              <a:t>1/27/13</a:t>
+              <a:t>6/25/26</a:t>
             </a:fld>
             <a:endParaRPr lang="en-US"/>
           </a:p>
@@ -3092,7 +3090,7 @@
 </file>
 
 <file path=ppt/slides/slide1.xml><?xml version="1.0" encoding="utf-8"?>
-<p:sld xmlns:a="http://schemas.openxmlformats.org/drawingml/2006/main" xmlns:p="http://schemas.openxmlformats.org/presentationml/2006/main" xmlns:r="http://schemas.openxmlformats.org/officeDocument/2006/relationships">
+<p:sld xmlns:a="http://schemas.openxmlformats.org/drawingml/2006/main" xmlns:r="http://schemas.openxmlformats.org/officeDocument/2006/relationships" xmlns:p="http://schemas.openxmlformats.org/presentationml/2006/main">
   <p:cSld>
     <p:spTree>
       <p:nvGrpSpPr>
@@ -3100,7 +3098,14 @@
         <p:cNvGrpSpPr/>
         <p:nvPr/>
       </p:nvGrpSpPr>
-      <p:grpSpPr/>
+      <p:grpSpPr>
+        <a:xfrm>
+          <a:off x="0" y="0"/>
+          <a:ext cx="0" cy="0"/>
+          <a:chOff x="0" y="0"/>
+          <a:chExt cx="0" cy="0"/>
+        </a:xfrm>
+      </p:grpSpPr>
       <p:sp>
         <p:nvSpPr>
           <p:cNvPr id="2" name="Rectangle 1"/>
@@ -3109,7 +3114,7 @@
         </p:nvSpPr>
         <p:spPr>
           <a:xfrm>
-            <a:off x="0" y="0"/>
+            <a:off x="0" y="76782"/>
             <a:ext cx="12191695" cy="6858000"/>
           </a:xfrm>
           <a:prstGeom prst="rect">
@@ -3142,6 +3147,7 @@
           <a:lstStyle/>
           <a:p>
             <a:pPr algn="ctr"/>
+            <a:endParaRPr/>
           </a:p>
         </p:txBody>
       </p:sp>
@@ -3175,6 +3181,7 @@
               </a:defRPr>
             </a:pPr>
             <a:r>
+              <a:rPr dirty="0"/>
               <a:t>Method 1 (Ground-Distance) Slope Estimation</a:t>
             </a:r>
           </a:p>
@@ -3187,6 +3194,7 @@
               </a:defRPr>
             </a:pPr>
             <a:r>
+              <a:rPr dirty="0"/>
               <a:t>Cross-application to the Method-2 dataset · per-segment slope analysis · Robinson plan</a:t>
             </a:r>
           </a:p>
@@ -3199,6 +3207,7 @@
               </a:defRPr>
             </a:pPr>
             <a:r>
+              <a:rPr dirty="0"/>
               <a:t>Drone terrain slope from VGGT reconstructions</a:t>
             </a:r>
           </a:p>
@@ -3213,7 +3222,7 @@
 </file>
 
 <file path=ppt/slides/slide10.xml><?xml version="1.0" encoding="utf-8"?>
-<p:sld xmlns:a="http://schemas.openxmlformats.org/drawingml/2006/main" xmlns:p="http://schemas.openxmlformats.org/presentationml/2006/main" xmlns:r="http://schemas.openxmlformats.org/officeDocument/2006/relationships">
+<p:sld xmlns:a="http://schemas.openxmlformats.org/drawingml/2006/main" xmlns:r="http://schemas.openxmlformats.org/officeDocument/2006/relationships" xmlns:p="http://schemas.openxmlformats.org/presentationml/2006/main">
   <p:cSld>
     <p:spTree>
       <p:nvGrpSpPr>
@@ -3221,7 +3230,14 @@
         <p:cNvGrpSpPr/>
         <p:nvPr/>
       </p:nvGrpSpPr>
-      <p:grpSpPr/>
+      <p:grpSpPr>
+        <a:xfrm>
+          <a:off x="0" y="0"/>
+          <a:ext cx="0" cy="0"/>
+          <a:chOff x="0" y="0"/>
+          <a:chExt cx="0" cy="0"/>
+        </a:xfrm>
+      </p:grpSpPr>
       <p:sp>
         <p:nvSpPr>
           <p:cNvPr id="2" name="Rectangle 1"/>
@@ -3263,6 +3279,7 @@
           <a:lstStyle/>
           <a:p>
             <a:pPr algn="ctr"/>
+            <a:endParaRPr/>
           </a:p>
         </p:txBody>
       </p:sp>
@@ -3461,7 +3478,7 @@
 </file>
 
 <file path=ppt/slides/slide11.xml><?xml version="1.0" encoding="utf-8"?>
-<p:sld xmlns:a="http://schemas.openxmlformats.org/drawingml/2006/main" xmlns:p="http://schemas.openxmlformats.org/presentationml/2006/main" xmlns:r="http://schemas.openxmlformats.org/officeDocument/2006/relationships">
+<p:sld xmlns:a="http://schemas.openxmlformats.org/drawingml/2006/main" xmlns:r="http://schemas.openxmlformats.org/officeDocument/2006/relationships" xmlns:p="http://schemas.openxmlformats.org/presentationml/2006/main">
   <p:cSld>
     <p:spTree>
       <p:nvGrpSpPr>
@@ -3469,7 +3486,14 @@
         <p:cNvGrpSpPr/>
         <p:nvPr/>
       </p:nvGrpSpPr>
-      <p:grpSpPr/>
+      <p:grpSpPr>
+        <a:xfrm>
+          <a:off x="0" y="0"/>
+          <a:ext cx="0" cy="0"/>
+          <a:chOff x="0" y="0"/>
+          <a:chExt cx="0" cy="0"/>
+        </a:xfrm>
+      </p:grpSpPr>
       <p:sp>
         <p:nvSpPr>
           <p:cNvPr id="2" name="Rectangle 1"/>
@@ -3511,6 +3535,7 @@
           <a:lstStyle/>
           <a:p>
             <a:pPr algn="ctr"/>
+            <a:endParaRPr/>
           </a:p>
         </p:txBody>
       </p:sp>
@@ -3641,7 +3666,7 @@
 </file>
 
 <file path=ppt/slides/slide12.xml><?xml version="1.0" encoding="utf-8"?>
-<p:sld xmlns:a="http://schemas.openxmlformats.org/drawingml/2006/main" xmlns:p="http://schemas.openxmlformats.org/presentationml/2006/main" xmlns:r="http://schemas.openxmlformats.org/officeDocument/2006/relationships">
+<p:sld xmlns:a="http://schemas.openxmlformats.org/drawingml/2006/main" xmlns:r="http://schemas.openxmlformats.org/officeDocument/2006/relationships" xmlns:p="http://schemas.openxmlformats.org/presentationml/2006/main">
   <p:cSld>
     <p:spTree>
       <p:nvGrpSpPr>
@@ -3649,7 +3674,14 @@
         <p:cNvGrpSpPr/>
         <p:nvPr/>
       </p:nvGrpSpPr>
-      <p:grpSpPr/>
+      <p:grpSpPr>
+        <a:xfrm>
+          <a:off x="0" y="0"/>
+          <a:ext cx="0" cy="0"/>
+          <a:chOff x="0" y="0"/>
+          <a:chExt cx="0" cy="0"/>
+        </a:xfrm>
+      </p:grpSpPr>
       <p:sp>
         <p:nvSpPr>
           <p:cNvPr id="2" name="Rectangle 1"/>
@@ -3691,6 +3723,7 @@
           <a:lstStyle/>
           <a:p>
             <a:pPr algn="ctr"/>
+            <a:endParaRPr/>
           </a:p>
         </p:txBody>
       </p:sp>
@@ -3724,7 +3757,7 @@
               </a:defRPr>
             </a:pPr>
             <a:r>
-              <a:t>Robinson datasets — ready to run on the A100 box</a:t>
+              <a:t>Fixing the up/down sign — anchor to GPS, not VGGT</a:t>
             </a:r>
           </a:p>
         </p:txBody>
@@ -3737,8 +3770,8 @@
         </p:nvSpPr>
         <p:spPr>
           <a:xfrm>
-            <a:off x="640080" y="1371600"/>
-            <a:ext cx="10881360" cy="4754880"/>
+            <a:off x="457200" y="1143000"/>
+            <a:ext cx="11247120" cy="457200"/>
           </a:xfrm>
           <a:prstGeom prst="rect">
             <a:avLst/>
@@ -3752,32 +3785,82 @@
           <a:lstStyle/>
           <a:p>
             <a:pPr>
-              <a:spcAft>
-                <a:spcPts val="600"/>
-              </a:spcAft>
-              <a:defRPr sz="1700">
-                <a:solidFill>
-                  <a:srgbClr val="264653"/>
+              <a:defRPr sz="1500">
+                <a:solidFill>
+                  <a:srgbClr val="555555"/>
                 </a:solidFill>
               </a:defRPr>
             </a:pPr>
             <a:r>
-              <a:t>• The two Robinson datasets need VGGT reconstruction first (GPU step) — that part runs on the A100 machine.</a:t>
-            </a:r>
-          </a:p>
+              <a:t>VGGT has no gravity sensor, so its vertical axis (and the slope sign) is not reliable</a:t>
+            </a:r>
+          </a:p>
+        </p:txBody>
+      </p:sp>
+      <p:sp>
+        <p:nvSpPr>
+          <p:cNvPr id="5" name="TextBox 4"/>
+          <p:cNvSpPr txBox="1"/>
+          <p:nvPr/>
+        </p:nvSpPr>
+        <p:spPr>
+          <a:xfrm>
+            <a:off x="548640" y="1234440"/>
+            <a:ext cx="5486400" cy="5212080"/>
+          </a:xfrm>
+          <a:prstGeom prst="rect">
+            <a:avLst/>
+          </a:prstGeom>
+          <a:noFill/>
+        </p:spPr>
+        <p:txBody>
+          <a:bodyPr wrap="square">
+            <a:spAutoFit/>
+          </a:bodyPr>
+          <a:lstStyle/>
           <a:p>
             <a:pPr>
               <a:spcAft>
                 <a:spcPts val="600"/>
               </a:spcAft>
-              <a:defRPr sz="1700">
+              <a:defRPr sz="1600">
                 <a:solidFill>
                   <a:srgbClr val="264653"/>
                 </a:solidFill>
               </a:defRPr>
             </a:pPr>
             <a:r>
-              <a:t>• A script is prepared:  run_robinson.py</a:t>
+              <a:t>• Method 1 reads slope in VGGT's coordinate frame, assuming +Y = gravity.</a:t>
+            </a:r>
+          </a:p>
+          <a:p>
+            <a:pPr>
+              <a:spcAft>
+                <a:spcPts val="600"/>
+              </a:spcAft>
+              <a:defRPr sz="1600">
+                <a:solidFill>
+                  <a:srgbClr val="264653"/>
+                </a:solidFill>
+              </a:defRPr>
+            </a:pPr>
+            <a:r>
+              <a:t>• VGGT never measures gravity — it picks an arbitrary frame — so the up/down SIGN can come out backwards.</a:t>
+            </a:r>
+          </a:p>
+          <a:p>
+            <a:pPr>
+              <a:spcAft>
+                <a:spcPts val="600"/>
+              </a:spcAft>
+              <a:defRPr sz="1600">
+                <a:solidFill>
+                  <a:srgbClr val="264653"/>
+                </a:solidFill>
+              </a:defRPr>
+            </a:pPr>
+            <a:r>
+              <a:t>• Proof on Robinson uphill: the photos carry GPS, and the drone climbed 168.7 → 172.3 m (clearly uphill).</a:t>
             </a:r>
           </a:p>
           <a:p>
@@ -3785,14 +3868,14 @@
               <a:spcAft>
                 <a:spcPts val="600"/>
               </a:spcAft>
-              <a:defRPr sz="1500">
+              <a:defRPr sz="1400">
                 <a:solidFill>
                   <a:srgbClr val="555555"/>
                 </a:solidFill>
               </a:defRPr>
             </a:pPr>
             <a:r>
-              <a:t>– python run_robinson.py /path/to/robinson_unzipped --multi</a:t>
+              <a:t>– GPS:      +16.3° uphill  (R²=0.93)</a:t>
             </a:r>
           </a:p>
           <a:p>
@@ -3800,29 +3883,14 @@
               <a:spcAft>
                 <a:spcPts val="600"/>
               </a:spcAft>
-              <a:defRPr sz="1500">
+              <a:defRPr sz="1400">
                 <a:solidFill>
                   <a:srgbClr val="555555"/>
                 </a:solidFill>
               </a:defRPr>
             </a:pPr>
             <a:r>
-              <a:t>– Reconstructs all images (1, 2, 3, …) → GLB, then applies Method 1 automatically</a:t>
-            </a:r>
-          </a:p>
-          <a:p>
-            <a:pPr lvl="1">
-              <a:spcAft>
-                <a:spcPts val="600"/>
-              </a:spcAft>
-              <a:defRPr sz="1500">
-                <a:solidFill>
-                  <a:srgbClr val="555555"/>
-                </a:solidFill>
-              </a:defRPr>
-            </a:pPr>
-            <a:r>
-              <a:t>– Outputs signed slope (+ uphill / − downhill), R², and a per-segment plot per dataset</a:t>
+              <a:t>– Method 1: −2.6°  downhill (R²=0.29)  ✗ wrong sign &amp; noisy</a:t>
             </a:r>
           </a:p>
           <a:p>
@@ -3830,29 +3898,73 @@
               <a:spcAft>
                 <a:spcPts val="600"/>
               </a:spcAft>
-              <a:defRPr sz="1700">
+              <a:defRPr sz="1600">
                 <a:solidFill>
                   <a:srgbClr val="264653"/>
                 </a:solidFill>
               </a:defRPr>
             </a:pPr>
             <a:r>
-              <a:t>• Once the GLBs exist, re-running build_slides.py will fold the Robinson results and plots into this deck.</a:t>
-            </a:r>
-          </a:p>
-          <a:p>
-            <a:pPr>
-              <a:spcAft>
-                <a:spcPts val="600"/>
-              </a:spcAft>
-              <a:defRPr sz="1700">
-                <a:solidFill>
-                  <a:srgbClr val="264653"/>
+              <a:t>• Fix: when photos carry GPS, take the sign (and a metric slope) from the GPS track. Otherwise fall back to the known flight label.</a:t>
+            </a:r>
+          </a:p>
+        </p:txBody>
+      </p:sp>
+      <p:pic>
+        <p:nvPicPr>
+          <p:cNvPr id="6" name="Picture 5" descr="robinson_uphill_gps_track.png"/>
+          <p:cNvPicPr>
+            <a:picLocks noChangeAspect="1"/>
+          </p:cNvPicPr>
+          <p:nvPr/>
+        </p:nvPicPr>
+        <p:blipFill>
+          <a:blip r:embed="rId2"/>
+          <a:stretch>
+            <a:fillRect/>
+          </a:stretch>
+        </p:blipFill>
+        <p:spPr>
+          <a:xfrm>
+            <a:off x="6126480" y="1733495"/>
+            <a:ext cx="5760720" cy="3756768"/>
+          </a:xfrm>
+          <a:prstGeom prst="rect">
+            <a:avLst/>
+          </a:prstGeom>
+        </p:spPr>
+      </p:pic>
+      <p:sp>
+        <p:nvSpPr>
+          <p:cNvPr id="7" name="TextBox 6"/>
+          <p:cNvSpPr txBox="1"/>
+          <p:nvPr/>
+        </p:nvSpPr>
+        <p:spPr>
+          <a:xfrm>
+            <a:off x="457200" y="5943600"/>
+            <a:ext cx="11247120" cy="365760"/>
+          </a:xfrm>
+          <a:prstGeom prst="rect">
+            <a:avLst/>
+          </a:prstGeom>
+          <a:noFill/>
+        </p:spPr>
+        <p:txBody>
+          <a:bodyPr wrap="square">
+            <a:spAutoFit/>
+          </a:bodyPr>
+          <a:lstStyle/>
+          <a:p>
+            <a:pPr algn="ctr">
+              <a:defRPr sz="1200" i="1">
+                <a:solidFill>
+                  <a:srgbClr val="555555"/>
                 </a:solidFill>
               </a:defRPr>
             </a:pPr>
             <a:r>
-              <a:t>• Expectation: if the Robinson flights follow/observe the terrain at an angle, Method 1 should give a clean slope; if they are level passes, watch for low R² (the flat-rebuild case shown earlier).</a:t>
+              <a:t>Robinson uphill: GPS altitude vs. along-track distance — the gravity-true profile.</a:t>
             </a:r>
           </a:p>
         </p:txBody>
@@ -3866,7 +3978,7 @@
 </file>
 
 <file path=ppt/slides/slide13.xml><?xml version="1.0" encoding="utf-8"?>
-<p:sld xmlns:a="http://schemas.openxmlformats.org/drawingml/2006/main" xmlns:p="http://schemas.openxmlformats.org/presentationml/2006/main" xmlns:r="http://schemas.openxmlformats.org/officeDocument/2006/relationships">
+<p:sld xmlns:a="http://schemas.openxmlformats.org/drawingml/2006/main" xmlns:r="http://schemas.openxmlformats.org/officeDocument/2006/relationships" xmlns:p="http://schemas.openxmlformats.org/presentationml/2006/main">
   <p:cSld>
     <p:spTree>
       <p:nvGrpSpPr>
@@ -3874,7 +3986,14 @@
         <p:cNvGrpSpPr/>
         <p:nvPr/>
       </p:nvGrpSpPr>
-      <p:grpSpPr/>
+      <p:grpSpPr>
+        <a:xfrm>
+          <a:off x="0" y="0"/>
+          <a:ext cx="0" cy="0"/>
+          <a:chOff x="0" y="0"/>
+          <a:chExt cx="0" cy="0"/>
+        </a:xfrm>
+      </p:grpSpPr>
       <p:sp>
         <p:nvSpPr>
           <p:cNvPr id="2" name="Rectangle 1"/>
@@ -3916,6 +4035,7 @@
           <a:lstStyle/>
           <a:p>
             <a:pPr algn="ctr"/>
+            <a:endParaRPr/>
           </a:p>
         </p:txBody>
       </p:sp>
@@ -3949,7 +4069,7 @@
               </a:defRPr>
             </a:pPr>
             <a:r>
-              <a:t>Observations &amp; recommendations</a:t>
+              <a:t>Robinson datasets — results</a:t>
             </a:r>
           </a:p>
         </p:txBody>
@@ -3962,8 +4082,8 @@
         </p:nvSpPr>
         <p:spPr>
           <a:xfrm>
-            <a:off x="640080" y="1371600"/>
-            <a:ext cx="10881360" cy="4754880"/>
+            <a:off x="457200" y="1143000"/>
+            <a:ext cx="11247120" cy="457200"/>
           </a:xfrm>
           <a:prstGeom prst="rect">
             <a:avLst/>
@@ -3977,32 +4097,553 @@
           <a:lstStyle/>
           <a:p>
             <a:pPr>
-              <a:spcAft>
-                <a:spcPts val="600"/>
-              </a:spcAft>
-              <a:defRPr sz="1800">
-                <a:solidFill>
-                  <a:srgbClr val="264653"/>
+              <a:defRPr sz="1500">
+                <a:solidFill>
+                  <a:srgbClr val="555555"/>
                 </a:solidFill>
               </a:defRPr>
             </a:pPr>
             <a:r>
-              <a:t>• Method 1 is genuinely the more general method and transfers to the Method-2 dataset.</a:t>
-            </a:r>
-          </a:p>
+              <a:t>all images, signed (+ uphill / − downhill)</a:t>
+            </a:r>
+          </a:p>
+        </p:txBody>
+      </p:sp>
+      <p:graphicFrame>
+        <p:nvGraphicFramePr>
+          <p:cNvPr id="5" name="Table 4"/>
+          <p:cNvGraphicFramePr>
+            <a:graphicFrameLocks noGrp="1"/>
+          </p:cNvGraphicFramePr>
+          <p:nvPr/>
+        </p:nvGraphicFramePr>
+        <p:xfrm>
+          <a:off x="365760" y="1554480"/>
+          <a:ext cx="11430000" cy="2194560"/>
+        </p:xfrm>
+        <a:graphic>
+          <a:graphicData uri="http://schemas.openxmlformats.org/drawingml/2006/table">
+            <a:tbl>
+              <a:tblPr firstRow="1" bandRow="1">
+                <a:tableStyleId>{5C22544A-7EE6-4342-B048-85BDC9FD1C3A}</a:tableStyleId>
+              </a:tblPr>
+              <a:tblGrid>
+                <a:gridCol w="1737360">
+                  <a:extLst>
+                    <a:ext uri="{9D8B030D-6E8A-4147-A177-3AD203B41FA5}">
+                      <a16:colId xmlns:a16="http://schemas.microsoft.com/office/drawing/2014/main" val="20000"/>
+                    </a:ext>
+                  </a:extLst>
+                </a:gridCol>
+                <a:gridCol w="822960">
+                  <a:extLst>
+                    <a:ext uri="{9D8B030D-6E8A-4147-A177-3AD203B41FA5}">
+                      <a16:colId xmlns:a16="http://schemas.microsoft.com/office/drawing/2014/main" val="20001"/>
+                    </a:ext>
+                  </a:extLst>
+                </a:gridCol>
+                <a:gridCol w="2834640">
+                  <a:extLst>
+                    <a:ext uri="{9D8B030D-6E8A-4147-A177-3AD203B41FA5}">
+                      <a16:colId xmlns:a16="http://schemas.microsoft.com/office/drawing/2014/main" val="20002"/>
+                    </a:ext>
+                  </a:extLst>
+                </a:gridCol>
+                <a:gridCol w="2468880">
+                  <a:extLst>
+                    <a:ext uri="{9D8B030D-6E8A-4147-A177-3AD203B41FA5}">
+                      <a16:colId xmlns:a16="http://schemas.microsoft.com/office/drawing/2014/main" val="20003"/>
+                    </a:ext>
+                  </a:extLst>
+                </a:gridCol>
+                <a:gridCol w="2103120">
+                  <a:extLst>
+                    <a:ext uri="{9D8B030D-6E8A-4147-A177-3AD203B41FA5}">
+                      <a16:colId xmlns:a16="http://schemas.microsoft.com/office/drawing/2014/main" val="20004"/>
+                    </a:ext>
+                  </a:extLst>
+                </a:gridCol>
+                <a:gridCol w="1463040">
+                  <a:extLst>
+                    <a:ext uri="{9D8B030D-6E8A-4147-A177-3AD203B41FA5}">
+                      <a16:colId xmlns:a16="http://schemas.microsoft.com/office/drawing/2014/main" val="20005"/>
+                    </a:ext>
+                  </a:extLst>
+                </a:gridCol>
+              </a:tblGrid>
+              <a:tr h="731520">
+                <a:tc>
+                  <a:txBody>
+                    <a:bodyPr/>
+                    <a:lstStyle/>
+                    <a:p>
+                      <a:pPr>
+                        <a:defRPr sz="1200" b="1">
+                          <a:solidFill>
+                            <a:srgbClr val="FFFFFF"/>
+                          </a:solidFill>
+                        </a:defRPr>
+                      </a:pPr>
+                      <a:r>
+                        <a:t>Dataset</a:t>
+                      </a:r>
+                    </a:p>
+                  </a:txBody>
+                  <a:tcPr>
+                    <a:solidFill>
+                      <a:srgbClr val="264653"/>
+                    </a:solidFill>
+                  </a:tcPr>
+                </a:tc>
+                <a:tc>
+                  <a:txBody>
+                    <a:bodyPr/>
+                    <a:lstStyle/>
+                    <a:p>
+                      <a:pPr>
+                        <a:defRPr sz="1200" b="1">
+                          <a:solidFill>
+                            <a:srgbClr val="FFFFFF"/>
+                          </a:solidFill>
+                        </a:defRPr>
+                      </a:pPr>
+                      <a:r>
+                        <a:t>Imgs</a:t>
+                      </a:r>
+                    </a:p>
+                  </a:txBody>
+                  <a:tcPr>
+                    <a:solidFill>
+                      <a:srgbClr val="264653"/>
+                    </a:solidFill>
+                  </a:tcPr>
+                </a:tc>
+                <a:tc>
+                  <a:txBody>
+                    <a:bodyPr/>
+                    <a:lstStyle/>
+                    <a:p>
+                      <a:pPr>
+                        <a:defRPr sz="1200" b="1">
+                          <a:solidFill>
+                            <a:srgbClr val="FFFFFF"/>
+                          </a:solidFill>
+                        </a:defRPr>
+                      </a:pPr>
+                      <a:r>
+                        <a:t>Method 1 (VGGT)</a:t>
+                      </a:r>
+                    </a:p>
+                  </a:txBody>
+                  <a:tcPr>
+                    <a:solidFill>
+                      <a:srgbClr val="264653"/>
+                    </a:solidFill>
+                  </a:tcPr>
+                </a:tc>
+                <a:tc>
+                  <a:txBody>
+                    <a:bodyPr/>
+                    <a:lstStyle/>
+                    <a:p>
+                      <a:pPr>
+                        <a:defRPr sz="1200" b="1">
+                          <a:solidFill>
+                            <a:srgbClr val="FFFFFF"/>
+                          </a:solidFill>
+                        </a:defRPr>
+                      </a:pPr>
+                      <a:r>
+                        <a:t>GPS track</a:t>
+                      </a:r>
+                    </a:p>
+                  </a:txBody>
+                  <a:tcPr>
+                    <a:solidFill>
+                      <a:srgbClr val="264653"/>
+                    </a:solidFill>
+                  </a:tcPr>
+                </a:tc>
+                <a:tc>
+                  <a:txBody>
+                    <a:bodyPr/>
+                    <a:lstStyle/>
+                    <a:p>
+                      <a:pPr>
+                        <a:defRPr sz="1200" b="1">
+                          <a:solidFill>
+                            <a:srgbClr val="FFFFFF"/>
+                          </a:solidFill>
+                        </a:defRPr>
+                      </a:pPr>
+                      <a:r>
+                        <a:t>FINAL</a:t>
+                      </a:r>
+                    </a:p>
+                  </a:txBody>
+                  <a:tcPr>
+                    <a:solidFill>
+                      <a:srgbClr val="264653"/>
+                    </a:solidFill>
+                  </a:tcPr>
+                </a:tc>
+                <a:tc>
+                  <a:txBody>
+                    <a:bodyPr/>
+                    <a:lstStyle/>
+                    <a:p>
+                      <a:pPr>
+                        <a:defRPr sz="1200" b="1">
+                          <a:solidFill>
+                            <a:srgbClr val="FFFFFF"/>
+                          </a:solidFill>
+                        </a:defRPr>
+                      </a:pPr>
+                      <a:r>
+                        <a:t>Sign from</a:t>
+                      </a:r>
+                    </a:p>
+                  </a:txBody>
+                  <a:tcPr>
+                    <a:solidFill>
+                      <a:srgbClr val="264653"/>
+                    </a:solidFill>
+                  </a:tcPr>
+                </a:tc>
+                <a:extLst>
+                  <a:ext uri="{0D108BD9-81ED-4DB2-BD59-A6C34878D82A}">
+                    <a16:rowId xmlns:a16="http://schemas.microsoft.com/office/drawing/2014/main" val="10000"/>
+                  </a:ext>
+                </a:extLst>
+              </a:tr>
+              <a:tr h="731520">
+                <a:tc>
+                  <a:txBody>
+                    <a:bodyPr/>
+                    <a:lstStyle/>
+                    <a:p>
+                      <a:pPr>
+                        <a:defRPr sz="1200" b="0">
+                          <a:solidFill>
+                            <a:srgbClr val="264653"/>
+                          </a:solidFill>
+                        </a:defRPr>
+                      </a:pPr>
+                      <a:r>
+                        <a:t>downhill</a:t>
+                      </a:r>
+                    </a:p>
+                  </a:txBody>
+                  <a:tcPr>
+                    <a:solidFill>
+                      <a:srgbClr val="EDF3F2"/>
+                    </a:solidFill>
+                  </a:tcPr>
+                </a:tc>
+                <a:tc>
+                  <a:txBody>
+                    <a:bodyPr/>
+                    <a:lstStyle/>
+                    <a:p>
+                      <a:pPr>
+                        <a:defRPr sz="1200" b="0">
+                          <a:solidFill>
+                            <a:srgbClr val="264653"/>
+                          </a:solidFill>
+                        </a:defRPr>
+                      </a:pPr>
+                      <a:r>
+                        <a:t>5</a:t>
+                      </a:r>
+                    </a:p>
+                  </a:txBody>
+                  <a:tcPr>
+                    <a:solidFill>
+                      <a:srgbClr val="EDF3F2"/>
+                    </a:solidFill>
+                  </a:tcPr>
+                </a:tc>
+                <a:tc>
+                  <a:txBody>
+                    <a:bodyPr/>
+                    <a:lstStyle/>
+                    <a:p>
+                      <a:pPr>
+                        <a:defRPr sz="1200" b="0">
+                          <a:solidFill>
+                            <a:srgbClr val="264653"/>
+                          </a:solidFill>
+                        </a:defRPr>
+                      </a:pPr>
+                      <a:r>
+                        <a:t>+5.65° (R²=1.00)</a:t>
+                      </a:r>
+                    </a:p>
+                  </a:txBody>
+                  <a:tcPr>
+                    <a:solidFill>
+                      <a:srgbClr val="EDF3F2"/>
+                    </a:solidFill>
+                  </a:tcPr>
+                </a:tc>
+                <a:tc>
+                  <a:txBody>
+                    <a:bodyPr/>
+                    <a:lstStyle/>
+                    <a:p>
+                      <a:pPr>
+                        <a:defRPr sz="1200" b="0">
+                          <a:solidFill>
+                            <a:srgbClr val="264653"/>
+                          </a:solidFill>
+                        </a:defRPr>
+                      </a:pPr>
+                      <a:r>
+                        <a:t>—</a:t>
+                      </a:r>
+                    </a:p>
+                  </a:txBody>
+                  <a:tcPr>
+                    <a:solidFill>
+                      <a:srgbClr val="EDF3F2"/>
+                    </a:solidFill>
+                  </a:tcPr>
+                </a:tc>
+                <a:tc>
+                  <a:txBody>
+                    <a:bodyPr/>
+                    <a:lstStyle/>
+                    <a:p>
+                      <a:pPr>
+                        <a:defRPr sz="1200" b="1">
+                          <a:solidFill>
+                            <a:srgbClr val="E76F51"/>
+                          </a:solidFill>
+                        </a:defRPr>
+                      </a:pPr>
+                      <a:r>
+                        <a:t>-5.65° downhill</a:t>
+                      </a:r>
+                    </a:p>
+                  </a:txBody>
+                  <a:tcPr>
+                    <a:solidFill>
+                      <a:srgbClr val="EDF3F2"/>
+                    </a:solidFill>
+                  </a:tcPr>
+                </a:tc>
+                <a:tc>
+                  <a:txBody>
+                    <a:bodyPr/>
+                    <a:lstStyle/>
+                    <a:p>
+                      <a:pPr>
+                        <a:defRPr sz="1200" b="0">
+                          <a:solidFill>
+                            <a:srgbClr val="264653"/>
+                          </a:solidFill>
+                        </a:defRPr>
+                      </a:pPr>
+                      <a:r>
+                        <a:t>folder label</a:t>
+                      </a:r>
+                    </a:p>
+                  </a:txBody>
+                  <a:tcPr>
+                    <a:solidFill>
+                      <a:srgbClr val="EDF3F2"/>
+                    </a:solidFill>
+                  </a:tcPr>
+                </a:tc>
+                <a:extLst>
+                  <a:ext uri="{0D108BD9-81ED-4DB2-BD59-A6C34878D82A}">
+                    <a16:rowId xmlns:a16="http://schemas.microsoft.com/office/drawing/2014/main" val="10001"/>
+                  </a:ext>
+                </a:extLst>
+              </a:tr>
+              <a:tr h="731520">
+                <a:tc>
+                  <a:txBody>
+                    <a:bodyPr/>
+                    <a:lstStyle/>
+                    <a:p>
+                      <a:pPr>
+                        <a:defRPr sz="1200" b="0">
+                          <a:solidFill>
+                            <a:srgbClr val="264653"/>
+                          </a:solidFill>
+                        </a:defRPr>
+                      </a:pPr>
+                      <a:r>
+                        <a:t>uphill</a:t>
+                      </a:r>
+                    </a:p>
+                  </a:txBody>
+                  <a:tcPr>
+                    <a:solidFill>
+                      <a:srgbClr val="FFFFFF"/>
+                    </a:solidFill>
+                  </a:tcPr>
+                </a:tc>
+                <a:tc>
+                  <a:txBody>
+                    <a:bodyPr/>
+                    <a:lstStyle/>
+                    <a:p>
+                      <a:pPr>
+                        <a:defRPr sz="1200" b="0">
+                          <a:solidFill>
+                            <a:srgbClr val="264653"/>
+                          </a:solidFill>
+                        </a:defRPr>
+                      </a:pPr>
+                      <a:r>
+                        <a:t>5</a:t>
+                      </a:r>
+                    </a:p>
+                  </a:txBody>
+                  <a:tcPr>
+                    <a:solidFill>
+                      <a:srgbClr val="FFFFFF"/>
+                    </a:solidFill>
+                  </a:tcPr>
+                </a:tc>
+                <a:tc>
+                  <a:txBody>
+                    <a:bodyPr/>
+                    <a:lstStyle/>
+                    <a:p>
+                      <a:pPr>
+                        <a:defRPr sz="1200" b="0">
+                          <a:solidFill>
+                            <a:srgbClr val="264653"/>
+                          </a:solidFill>
+                        </a:defRPr>
+                      </a:pPr>
+                      <a:r>
+                        <a:t>-2.61° (R²=0.29)</a:t>
+                      </a:r>
+                    </a:p>
+                  </a:txBody>
+                  <a:tcPr>
+                    <a:solidFill>
+                      <a:srgbClr val="FFFFFF"/>
+                    </a:solidFill>
+                  </a:tcPr>
+                </a:tc>
+                <a:tc>
+                  <a:txBody>
+                    <a:bodyPr/>
+                    <a:lstStyle/>
+                    <a:p>
+                      <a:pPr>
+                        <a:defRPr sz="1200" b="0">
+                          <a:solidFill>
+                            <a:srgbClr val="264653"/>
+                          </a:solidFill>
+                        </a:defRPr>
+                      </a:pPr>
+                      <a:r>
+                        <a:t>+16.30° (R²=0.93)</a:t>
+                      </a:r>
+                    </a:p>
+                  </a:txBody>
+                  <a:tcPr>
+                    <a:solidFill>
+                      <a:srgbClr val="FFFFFF"/>
+                    </a:solidFill>
+                  </a:tcPr>
+                </a:tc>
+                <a:tc>
+                  <a:txBody>
+                    <a:bodyPr/>
+                    <a:lstStyle/>
+                    <a:p>
+                      <a:pPr>
+                        <a:defRPr sz="1200" b="1">
+                          <a:solidFill>
+                            <a:srgbClr val="2A9D8F"/>
+                          </a:solidFill>
+                        </a:defRPr>
+                      </a:pPr>
+                      <a:r>
+                        <a:t>+16.30° uphill</a:t>
+                      </a:r>
+                    </a:p>
+                  </a:txBody>
+                  <a:tcPr>
+                    <a:solidFill>
+                      <a:srgbClr val="FFFFFF"/>
+                    </a:solidFill>
+                  </a:tcPr>
+                </a:tc>
+                <a:tc>
+                  <a:txBody>
+                    <a:bodyPr/>
+                    <a:lstStyle/>
+                    <a:p>
+                      <a:pPr>
+                        <a:defRPr sz="1200" b="0">
+                          <a:solidFill>
+                            <a:srgbClr val="264653"/>
+                          </a:solidFill>
+                        </a:defRPr>
+                      </a:pPr>
+                      <a:r>
+                        <a:t>GPS</a:t>
+                      </a:r>
+                    </a:p>
+                  </a:txBody>
+                  <a:tcPr>
+                    <a:solidFill>
+                      <a:srgbClr val="FFFFFF"/>
+                    </a:solidFill>
+                  </a:tcPr>
+                </a:tc>
+                <a:extLst>
+                  <a:ext uri="{0D108BD9-81ED-4DB2-BD59-A6C34878D82A}">
+                    <a16:rowId xmlns:a16="http://schemas.microsoft.com/office/drawing/2014/main" val="10002"/>
+                  </a:ext>
+                </a:extLst>
+              </a:tr>
+            </a:tbl>
+          </a:graphicData>
+        </a:graphic>
+      </p:graphicFrame>
+      <p:sp>
+        <p:nvSpPr>
+          <p:cNvPr id="6" name="TextBox 5"/>
+          <p:cNvSpPr txBox="1"/>
+          <p:nvPr/>
+        </p:nvSpPr>
+        <p:spPr>
+          <a:xfrm>
+            <a:off x="457200" y="4114800"/>
+            <a:ext cx="11338560" cy="2377440"/>
+          </a:xfrm>
+          <a:prstGeom prst="rect">
+            <a:avLst/>
+          </a:prstGeom>
+          <a:noFill/>
+        </p:spPr>
+        <p:txBody>
+          <a:bodyPr wrap="square">
+            <a:spAutoFit/>
+          </a:bodyPr>
+          <a:lstStyle/>
           <a:p>
             <a:pPr>
               <a:spcAft>
                 <a:spcPts val="600"/>
               </a:spcAft>
-              <a:defRPr sz="1800">
+              <a:defRPr sz="1400">
                 <a:solidFill>
                   <a:srgbClr val="264653"/>
                 </a:solidFill>
               </a:defRPr>
             </a:pPr>
             <a:r>
-              <a:t>• Its reliability tracks R²: trust the slope when R² is high; treat near-zero R² as 'no signal', not 'flat ground'.</a:t>
+              <a:t>• uphill — iPhone 14 with GPS: drone climbed; FINAL +16.3° uphill from the GPS track (Method 1's ground-fit was too noisy here, R²=0.29).</a:t>
             </a:r>
           </a:p>
           <a:p>
@@ -4010,14 +4651,14 @@
               <a:spcAft>
                 <a:spcPts val="600"/>
               </a:spcAft>
-              <a:defRPr sz="1800">
+              <a:defRPr sz="1400">
                 <a:solidFill>
                   <a:srgbClr val="264653"/>
                 </a:solidFill>
               </a:defRPr>
             </a:pPr>
             <a:r>
-              <a:t>• Use all images for the overall fit; consecutive-pair (per-segment) slopes are noisy and can spike — read them as a profile, not point values.</a:t>
+              <a:t>• downhill — DJI, GPS stripped from the files: Method 1's ground-fit is clean (R²≈1.00), so we keep its 5.65° magnitude and take the sign from the folder label → −5.65° downhill.</a:t>
             </a:r>
           </a:p>
           <a:p>
@@ -4025,29 +4666,49 @@
               <a:spcAft>
                 <a:spcPts val="600"/>
               </a:spcAft>
-              <a:defRPr sz="1800">
+              <a:defRPr sz="1400">
                 <a:solidFill>
                   <a:srgbClr val="264653"/>
                 </a:solidFill>
               </a:defRPr>
             </a:pPr>
             <a:r>
-              <a:t>• For best Method-1 results, prefer flights with vertical parallax (terrain-following or oblique), not pure level passes.</a:t>
-            </a:r>
-          </a:p>
-          <a:p>
-            <a:pPr>
-              <a:spcAft>
-                <a:spcPts val="600"/>
-              </a:spcAft>
-              <a:defRPr sz="1800">
-                <a:solidFill>
-                  <a:srgbClr val="264653"/>
+              <a:t>• To verify downhill independently, we'd need its flight log / original GPS — flagged for follow-up.</a:t>
+            </a:r>
+          </a:p>
+        </p:txBody>
+      </p:sp>
+      <p:sp>
+        <p:nvSpPr>
+          <p:cNvPr id="7" name="TextBox 6"/>
+          <p:cNvSpPr txBox="1"/>
+          <p:nvPr/>
+        </p:nvSpPr>
+        <p:spPr>
+          <a:xfrm>
+            <a:off x="457200" y="6400800"/>
+            <a:ext cx="11247120" cy="365760"/>
+          </a:xfrm>
+          <a:prstGeom prst="rect">
+            <a:avLst/>
+          </a:prstGeom>
+          <a:noFill/>
+        </p:spPr>
+        <p:txBody>
+          <a:bodyPr wrap="square">
+            <a:spAutoFit/>
+          </a:bodyPr>
+          <a:lstStyle/>
+          <a:p>
+            <a:pPr algn="ctr">
+              <a:defRPr sz="1100" i="1">
+                <a:solidFill>
+                  <a:srgbClr val="555555"/>
                 </a:solidFill>
               </a:defRPr>
             </a:pPr>
             <a:r>
-              <a:t>• On downhill fixed_distance2ground, Method 1 reads steeper than Method 2 (−7.9° vs −4.8°); worth checking which is closer to ground truth when available.</a:t>
+              <a:t>FINAL sign source: GPS where available, otherwise the known flight label. Magnitude: GPS when Method 1's R² is low, else Method 1.</a:t>
             </a:r>
           </a:p>
         </p:txBody>
@@ -4061,7 +4722,7 @@
 </file>
 
 <file path=ppt/slides/slide14.xml><?xml version="1.0" encoding="utf-8"?>
-<p:sld xmlns:a="http://schemas.openxmlformats.org/drawingml/2006/main" xmlns:p="http://schemas.openxmlformats.org/presentationml/2006/main" xmlns:r="http://schemas.openxmlformats.org/officeDocument/2006/relationships">
+<p:sld xmlns:a="http://schemas.openxmlformats.org/drawingml/2006/main" xmlns:r="http://schemas.openxmlformats.org/officeDocument/2006/relationships" xmlns:p="http://schemas.openxmlformats.org/presentationml/2006/main">
   <p:cSld>
     <p:spTree>
       <p:nvGrpSpPr>
@@ -4069,7 +4730,14 @@
         <p:cNvGrpSpPr/>
         <p:nvPr/>
       </p:nvGrpSpPr>
-      <p:grpSpPr/>
+      <p:grpSpPr>
+        <a:xfrm>
+          <a:off x="0" y="0"/>
+          <a:ext cx="0" cy="0"/>
+          <a:chOff x="0" y="0"/>
+          <a:chExt cx="0" cy="0"/>
+        </a:xfrm>
+      </p:grpSpPr>
       <p:sp>
         <p:nvSpPr>
           <p:cNvPr id="2" name="Rectangle 1"/>
@@ -4111,6 +4779,7 @@
           <a:lstStyle/>
           <a:p>
             <a:pPr algn="ctr"/>
+            <a:endParaRPr/>
           </a:p>
         </p:txBody>
       </p:sp>
@@ -4144,7 +4813,7 @@
               </a:defRPr>
             </a:pPr>
             <a:r>
-              <a:t>Files &amp; how to reproduce</a:t>
+              <a:t>Robinson — downhill</a:t>
             </a:r>
           </a:p>
         </p:txBody>
@@ -4157,8 +4826,8 @@
         </p:nvSpPr>
         <p:spPr>
           <a:xfrm>
-            <a:off x="640080" y="1371600"/>
-            <a:ext cx="10881360" cy="4754880"/>
+            <a:off x="457200" y="1143000"/>
+            <a:ext cx="11247120" cy="457200"/>
           </a:xfrm>
           <a:prstGeom prst="rect">
             <a:avLst/>
@@ -4172,92 +4841,97 @@
           <a:lstStyle/>
           <a:p>
             <a:pPr>
-              <a:spcAft>
-                <a:spcPts val="600"/>
-              </a:spcAft>
-              <a:defRPr sz="1700">
-                <a:solidFill>
-                  <a:srgbClr val="264653"/>
+              <a:defRPr sz="1500">
+                <a:solidFill>
+                  <a:srgbClr val="555555"/>
                 </a:solidFill>
               </a:defRPr>
             </a:pPr>
             <a:r>
-              <a:t>• method1_slope.py — Method 1 implementation (all-frames, signed, image-order) + plot helpers</a:t>
-            </a:r>
-          </a:p>
-          <a:p>
-            <a:pPr>
-              <a:spcAft>
-                <a:spcPts val="600"/>
-              </a:spcAft>
-              <a:defRPr sz="1700">
-                <a:solidFill>
-                  <a:srgbClr val="264653"/>
+              <a:t>FINAL -5.65° downhill   [Method 1 magnitude, folder-label sign]   ·   5 images</a:t>
+            </a:r>
+          </a:p>
+        </p:txBody>
+      </p:sp>
+      <p:pic>
+        <p:nvPicPr>
+          <p:cNvPr id="5" name="Picture 4" descr="robinson_downhill_method1_profile.png"/>
+          <p:cNvPicPr>
+            <a:picLocks noChangeAspect="1"/>
+          </p:cNvPicPr>
+          <p:nvPr/>
+        </p:nvPicPr>
+        <p:blipFill>
+          <a:blip r:embed="rId2"/>
+          <a:stretch>
+            <a:fillRect/>
+          </a:stretch>
+        </p:blipFill>
+        <p:spPr>
+          <a:xfrm>
+            <a:off x="274320" y="1612240"/>
+            <a:ext cx="5852160" cy="3816399"/>
+          </a:xfrm>
+          <a:prstGeom prst="rect">
+            <a:avLst/>
+          </a:prstGeom>
+        </p:spPr>
+      </p:pic>
+      <p:pic>
+        <p:nvPicPr>
+          <p:cNvPr id="6" name="Picture 5" descr="robinson_downhill_method1_segments.png"/>
+          <p:cNvPicPr>
+            <a:picLocks noChangeAspect="1"/>
+          </p:cNvPicPr>
+          <p:nvPr/>
+        </p:nvPicPr>
+        <p:blipFill>
+          <a:blip r:embed="rId3"/>
+          <a:stretch>
+            <a:fillRect/>
+          </a:stretch>
+        </p:blipFill>
+        <p:spPr>
+          <a:xfrm>
+            <a:off x="6035040" y="2017964"/>
+            <a:ext cx="5852160" cy="3004950"/>
+          </a:xfrm>
+          <a:prstGeom prst="rect">
+            <a:avLst/>
+          </a:prstGeom>
+        </p:spPr>
+      </p:pic>
+      <p:sp>
+        <p:nvSpPr>
+          <p:cNvPr id="7" name="TextBox 6"/>
+          <p:cNvSpPr txBox="1"/>
+          <p:nvPr/>
+        </p:nvSpPr>
+        <p:spPr>
+          <a:xfrm>
+            <a:off x="457200" y="5806440"/>
+            <a:ext cx="11247120" cy="365760"/>
+          </a:xfrm>
+          <a:prstGeom prst="rect">
+            <a:avLst/>
+          </a:prstGeom>
+          <a:noFill/>
+        </p:spPr>
+        <p:txBody>
+          <a:bodyPr wrap="square">
+            <a:spAutoFit/>
+          </a:bodyPr>
+          <a:lstStyle/>
+          <a:p>
+            <a:pPr algn="ctr">
+              <a:defRPr sz="1200" i="1">
+                <a:solidFill>
+                  <a:srgbClr val="555555"/>
                 </a:solidFill>
               </a:defRPr>
             </a:pPr>
             <a:r>
-              <a:t>• run_method1_existing.py — runs Method 1 on the existing GLBs, writes results/ plots + summary.json</a:t>
-            </a:r>
-          </a:p>
-          <a:p>
-            <a:pPr>
-              <a:spcAft>
-                <a:spcPts val="600"/>
-              </a:spcAft>
-              <a:defRPr sz="1700">
-                <a:solidFill>
-                  <a:srgbClr val="264653"/>
-                </a:solidFill>
-              </a:defRPr>
-            </a:pPr>
-            <a:r>
-              <a:t>• run_robinson.py — A100: reconstruct Robinson images with VGGT, then Method 1</a:t>
-            </a:r>
-          </a:p>
-          <a:p>
-            <a:pPr>
-              <a:spcAft>
-                <a:spcPts val="600"/>
-              </a:spcAft>
-              <a:defRPr sz="1700">
-                <a:solidFill>
-                  <a:srgbClr val="264653"/>
-                </a:solidFill>
-              </a:defRPr>
-            </a:pPr>
-            <a:r>
-              <a:t>• build_slides.py — regenerates this deck from results/</a:t>
-            </a:r>
-          </a:p>
-          <a:p>
-            <a:pPr>
-              <a:spcAft>
-                <a:spcPts val="600"/>
-              </a:spcAft>
-              <a:defRPr sz="1700">
-                <a:solidFill>
-                  <a:srgbClr val="264653"/>
-                </a:solidFill>
-              </a:defRPr>
-            </a:pPr>
-            <a:r>
-              <a:t>• results/ — per-segment plots, profile plots, 3D scenes, method1_summary.json</a:t>
-            </a:r>
-          </a:p>
-          <a:p>
-            <a:pPr>
-              <a:spcAft>
-                <a:spcPts val="600"/>
-              </a:spcAft>
-              <a:defRPr sz="1700">
-                <a:solidFill>
-                  <a:srgbClr val="264653"/>
-                </a:solidFill>
-              </a:defRPr>
-            </a:pPr>
-            <a:r>
-              <a:t>• Re-run order:  run_method1_existing.py  →  (A100) run_robinson.py  →  build_slides.py</a:t>
+              <a:t>Left: Method 1 ground-elevation fit.  Right: Method 1 per-segment slope by image index.</a:t>
             </a:r>
           </a:p>
         </p:txBody>
@@ -4270,8 +4944,8 @@
 </p:sld>
 </file>
 
-<file path=ppt/slides/slide2.xml><?xml version="1.0" encoding="utf-8"?>
-<p:sld xmlns:a="http://schemas.openxmlformats.org/drawingml/2006/main" xmlns:p="http://schemas.openxmlformats.org/presentationml/2006/main" xmlns:r="http://schemas.openxmlformats.org/officeDocument/2006/relationships">
+<file path=ppt/slides/slide15.xml><?xml version="1.0" encoding="utf-8"?>
+<p:sld xmlns:a="http://schemas.openxmlformats.org/drawingml/2006/main" xmlns:r="http://schemas.openxmlformats.org/officeDocument/2006/relationships" xmlns:p="http://schemas.openxmlformats.org/presentationml/2006/main">
   <p:cSld>
     <p:spTree>
       <p:nvGrpSpPr>
@@ -4279,7 +4953,14 @@
         <p:cNvGrpSpPr/>
         <p:nvPr/>
       </p:nvGrpSpPr>
-      <p:grpSpPr/>
+      <p:grpSpPr>
+        <a:xfrm>
+          <a:off x="0" y="0"/>
+          <a:ext cx="0" cy="0"/>
+          <a:chOff x="0" y="0"/>
+          <a:chExt cx="0" cy="0"/>
+        </a:xfrm>
+      </p:grpSpPr>
       <p:sp>
         <p:nvSpPr>
           <p:cNvPr id="2" name="Rectangle 1"/>
@@ -4321,6 +5002,7 @@
           <a:lstStyle/>
           <a:p>
             <a:pPr algn="ctr"/>
+            <a:endParaRPr/>
           </a:p>
         </p:txBody>
       </p:sp>
@@ -4354,7 +5036,7 @@
               </a:defRPr>
             </a:pPr>
             <a:r>
-              <a:t>What was asked, and the short answer</a:t>
+              <a:t>Robinson — uphill</a:t>
             </a:r>
           </a:p>
         </p:txBody>
@@ -4367,8 +5049,8 @@
         </p:nvSpPr>
         <p:spPr>
           <a:xfrm>
-            <a:off x="548640" y="1280160"/>
-            <a:ext cx="5577840" cy="5120640"/>
+            <a:off x="457200" y="1143000"/>
+            <a:ext cx="11247120" cy="457200"/>
           </a:xfrm>
           <a:prstGeom prst="rect">
             <a:avLst/>
@@ -4382,121 +5064,76 @@
           <a:lstStyle/>
           <a:p>
             <a:pPr>
-              <a:spcAft>
-                <a:spcPts val="600"/>
-              </a:spcAft>
-              <a:defRPr sz="1700">
-                <a:solidFill>
-                  <a:srgbClr val="264653"/>
+              <a:defRPr sz="1500">
+                <a:solidFill>
+                  <a:srgbClr val="555555"/>
                 </a:solidFill>
               </a:defRPr>
             </a:pPr>
             <a:r>
-              <a:t>• The request</a:t>
-            </a:r>
-          </a:p>
-          <a:p>
-            <a:pPr lvl="1">
-              <a:spcAft>
-                <a:spcPts val="600"/>
-              </a:spcAft>
-              <a:defRPr sz="1500">
-                <a:solidFill>
-                  <a:srgbClr val="555555"/>
-                </a:solidFill>
-              </a:defRPr>
-            </a:pPr>
-            <a:r>
-              <a:t>– Apply Method 1 to the dataset used by Method 2</a:t>
-            </a:r>
-          </a:p>
-          <a:p>
-            <a:pPr lvl="1">
-              <a:spcAft>
-                <a:spcPts val="600"/>
-              </a:spcAft>
-              <a:defRPr sz="1500">
-                <a:solidFill>
-                  <a:srgbClr val="555555"/>
-                </a:solidFill>
-              </a:defRPr>
-            </a:pPr>
-            <a:r>
-              <a:t>– Method 1 is more general — it doesn't assume fixed height above ground</a:t>
-            </a:r>
-          </a:p>
-          <a:p>
-            <a:pPr lvl="1">
-              <a:spcAft>
-                <a:spcPts val="600"/>
-              </a:spcAft>
-              <a:defRPr sz="1500">
-                <a:solidFill>
-                  <a:srgbClr val="555555"/>
-                </a:solidFill>
-              </a:defRPr>
-            </a:pPr>
-            <a:r>
-              <a:t>– Process the two Robinson datasets with Method 1</a:t>
-            </a:r>
-          </a:p>
-          <a:p>
-            <a:pPr lvl="1">
-              <a:spcAft>
-                <a:spcPts val="600"/>
-              </a:spcAft>
-              <a:defRPr sz="1500">
-                <a:solidFill>
-                  <a:srgbClr val="555555"/>
-                </a:solidFill>
-              </a:defRPr>
-            </a:pPr>
-            <a:r>
-              <a:t>– Report slope with a sign (+ uphill / − downhill); use all images</a:t>
-            </a:r>
-          </a:p>
-          <a:p>
-            <a:pPr lvl="1">
-              <a:spcAft>
-                <a:spcPts val="600"/>
-              </a:spcAft>
-              <a:defRPr sz="1500">
-                <a:solidFill>
-                  <a:srgbClr val="555555"/>
-                </a:solidFill>
-              </a:defRPr>
-            </a:pPr>
-            <a:r>
-              <a:t>– Per-segment slope plots; same plots for the previous dataset</a:t>
-            </a:r>
-          </a:p>
-          <a:p>
-            <a:pPr lvl="1">
-              <a:spcAft>
-                <a:spcPts val="600"/>
-              </a:spcAft>
-              <a:defRPr sz="1500">
-                <a:solidFill>
-                  <a:srgbClr val="555555"/>
-                </a:solidFill>
-              </a:defRPr>
-            </a:pPr>
-            <a:r>
-              <a:t>– Collect everything into a slide file</a:t>
-            </a:r>
-          </a:p>
-        </p:txBody>
-      </p:sp>
-      <p:sp>
-        <p:nvSpPr>
-          <p:cNvPr id="5" name="TextBox 4"/>
+              <a:t>FINAL +16.30° uphill   [GPS track]   ·   5 images</a:t>
+            </a:r>
+          </a:p>
+        </p:txBody>
+      </p:sp>
+      <p:pic>
+        <p:nvPicPr>
+          <p:cNvPr id="5" name="Picture 4" descr="robinson_uphill_gps_track.png"/>
+          <p:cNvPicPr>
+            <a:picLocks noChangeAspect="1"/>
+          </p:cNvPicPr>
+          <p:nvPr/>
+        </p:nvPicPr>
+        <p:blipFill>
+          <a:blip r:embed="rId2"/>
+          <a:stretch>
+            <a:fillRect/>
+          </a:stretch>
+        </p:blipFill>
+        <p:spPr>
+          <a:xfrm>
+            <a:off x="274320" y="1612240"/>
+            <a:ext cx="5852160" cy="3816399"/>
+          </a:xfrm>
+          <a:prstGeom prst="rect">
+            <a:avLst/>
+          </a:prstGeom>
+        </p:spPr>
+      </p:pic>
+      <p:pic>
+        <p:nvPicPr>
+          <p:cNvPr id="6" name="Picture 5" descr="robinson_uphill_method1_segments.png"/>
+          <p:cNvPicPr>
+            <a:picLocks noChangeAspect="1"/>
+          </p:cNvPicPr>
+          <p:nvPr/>
+        </p:nvPicPr>
+        <p:blipFill>
+          <a:blip r:embed="rId3"/>
+          <a:stretch>
+            <a:fillRect/>
+          </a:stretch>
+        </p:blipFill>
+        <p:spPr>
+          <a:xfrm>
+            <a:off x="6035040" y="2017964"/>
+            <a:ext cx="5852160" cy="3004950"/>
+          </a:xfrm>
+          <a:prstGeom prst="rect">
+            <a:avLst/>
+          </a:prstGeom>
+        </p:spPr>
+      </p:pic>
+      <p:sp>
+        <p:nvSpPr>
+          <p:cNvPr id="7" name="TextBox 6"/>
           <p:cNvSpPr txBox="1"/>
           <p:nvPr/>
         </p:nvSpPr>
         <p:spPr>
           <a:xfrm>
-            <a:off x="6355080" y="1280160"/>
-            <a:ext cx="5303520" cy="5120640"/>
+            <a:off x="457200" y="5806440"/>
+            <a:ext cx="11247120" cy="365760"/>
           </a:xfrm>
           <a:prstGeom prst="rect">
             <a:avLst/>
@@ -4509,108 +5146,15 @@
           </a:bodyPr>
           <a:lstStyle/>
           <a:p>
-            <a:pPr>
-              <a:spcAft>
-                <a:spcPts val="600"/>
-              </a:spcAft>
-              <a:defRPr sz="1700">
-                <a:solidFill>
-                  <a:srgbClr val="264653"/>
+            <a:pPr algn="ctr">
+              <a:defRPr sz="1200" i="1">
+                <a:solidFill>
+                  <a:srgbClr val="555555"/>
                 </a:solidFill>
               </a:defRPr>
             </a:pPr>
             <a:r>
-              <a:t>• Short answer</a:t>
-            </a:r>
-          </a:p>
-          <a:p>
-            <a:pPr lvl="1">
-              <a:spcAft>
-                <a:spcPts val="600"/>
-              </a:spcAft>
-              <a:defRPr sz="1500">
-                <a:solidFill>
-                  <a:srgbClr val="555555"/>
-                </a:solidFill>
-              </a:defRPr>
-            </a:pPr>
-            <a:r>
-              <a:t>– Method 1 transfers to the Method-2 dataset and works well</a:t>
-            </a:r>
-          </a:p>
-          <a:p>
-            <a:pPr lvl="1">
-              <a:spcAft>
-                <a:spcPts val="600"/>
-              </a:spcAft>
-              <a:defRPr sz="1500">
-                <a:solidFill>
-                  <a:srgbClr val="555555"/>
-                </a:solidFill>
-              </a:defRPr>
-            </a:pPr>
-            <a:r>
-              <a:t>– Uphill: +3.7° (Method 2: +3.4°) — close agreement, R²=0.99</a:t>
-            </a:r>
-          </a:p>
-          <a:p>
-            <a:pPr lvl="1">
-              <a:spcAft>
-                <a:spcPts val="600"/>
-              </a:spcAft>
-              <a:defRPr sz="1500">
-                <a:solidFill>
-                  <a:srgbClr val="555555"/>
-                </a:solidFill>
-              </a:defRPr>
-            </a:pPr>
-            <a:r>
-              <a:t>– Downhill: −7.9° (Method 2: −4.8°) — right direction, steeper</a:t>
-            </a:r>
-          </a:p>
-          <a:p>
-            <a:pPr lvl="1">
-              <a:spcAft>
-                <a:spcPts val="600"/>
-              </a:spcAft>
-              <a:defRPr sz="1500">
-                <a:solidFill>
-                  <a:srgbClr val="555555"/>
-                </a:solidFill>
-              </a:defRPr>
-            </a:pPr>
-            <a:r>
-              <a:t>– Key finding: Method 1 needs the reconstruction to capture vertical relief</a:t>
-            </a:r>
-          </a:p>
-          <a:p>
-            <a:pPr lvl="1">
-              <a:spcAft>
-                <a:spcPts val="600"/>
-              </a:spcAft>
-              <a:defRPr sz="1500">
-                <a:solidFill>
-                  <a:srgbClr val="555555"/>
-                </a:solidFill>
-              </a:defRPr>
-            </a:pPr>
-            <a:r>
-              <a:t>– It does on terrain-following flights; it does NOT on the level (fixed-altitude) flights — those rebuild nearly flat</a:t>
-            </a:r>
-          </a:p>
-          <a:p>
-            <a:pPr lvl="1">
-              <a:spcAft>
-                <a:spcPts val="600"/>
-              </a:spcAft>
-              <a:defRPr sz="1500">
-                <a:solidFill>
-                  <a:srgbClr val="555555"/>
-                </a:solidFill>
-              </a:defRPr>
-            </a:pPr>
-            <a:r>
-              <a:t>– Robinson: reconstruction script is ready to run on the A100 box</a:t>
+              <a:t>Left: GPS track (gravity-true).  Right: Method 1 per-segment slope by image index.</a:t>
             </a:r>
           </a:p>
         </p:txBody>
@@ -4623,8 +5167,8 @@
 </p:sld>
 </file>
 
-<file path=ppt/slides/slide3.xml><?xml version="1.0" encoding="utf-8"?>
-<p:sld xmlns:a="http://schemas.openxmlformats.org/drawingml/2006/main" xmlns:p="http://schemas.openxmlformats.org/presentationml/2006/main" xmlns:r="http://schemas.openxmlformats.org/officeDocument/2006/relationships">
+<file path=ppt/slides/slide16.xml><?xml version="1.0" encoding="utf-8"?>
+<p:sld xmlns:a="http://schemas.openxmlformats.org/drawingml/2006/main" xmlns:r="http://schemas.openxmlformats.org/officeDocument/2006/relationships" xmlns:p="http://schemas.openxmlformats.org/presentationml/2006/main">
   <p:cSld>
     <p:spTree>
       <p:nvGrpSpPr>
@@ -4632,7 +5176,14 @@
         <p:cNvGrpSpPr/>
         <p:nvPr/>
       </p:nvGrpSpPr>
-      <p:grpSpPr/>
+      <p:grpSpPr>
+        <a:xfrm>
+          <a:off x="0" y="0"/>
+          <a:ext cx="0" cy="0"/>
+          <a:chOff x="0" y="0"/>
+          <a:chExt cx="0" cy="0"/>
+        </a:xfrm>
+      </p:grpSpPr>
       <p:sp>
         <p:nvSpPr>
           <p:cNvPr id="2" name="Rectangle 1"/>
@@ -4674,6 +5225,7 @@
           <a:lstStyle/>
           <a:p>
             <a:pPr algn="ctr"/>
+            <a:endParaRPr/>
           </a:p>
         </p:txBody>
       </p:sp>
@@ -4707,7 +5259,7 @@
               </a:defRPr>
             </a:pPr>
             <a:r>
-              <a:t>How Method 1 works (ground-distance method)</a:t>
+              <a:t>Observations &amp; recommendations</a:t>
             </a:r>
           </a:p>
         </p:txBody>
@@ -4720,7 +5272,804 @@
         </p:nvSpPr>
         <p:spPr>
           <a:xfrm>
-            <a:off x="548640" y="1234440"/>
+            <a:off x="640080" y="1371600"/>
+            <a:ext cx="10881360" cy="4754880"/>
+          </a:xfrm>
+          <a:prstGeom prst="rect">
+            <a:avLst/>
+          </a:prstGeom>
+          <a:noFill/>
+        </p:spPr>
+        <p:txBody>
+          <a:bodyPr wrap="square">
+            <a:spAutoFit/>
+          </a:bodyPr>
+          <a:lstStyle/>
+          <a:p>
+            <a:pPr>
+              <a:spcAft>
+                <a:spcPts val="600"/>
+              </a:spcAft>
+              <a:defRPr sz="1600">
+                <a:solidFill>
+                  <a:srgbClr val="264653"/>
+                </a:solidFill>
+              </a:defRPr>
+            </a:pPr>
+            <a:r>
+              <a:t>• Method 1 estimates slope MAGNITUDE well when R² is high — but its up/down SIGN is unreliable, because VGGT's vertical axis is not gravity-locked.</a:t>
+            </a:r>
+          </a:p>
+          <a:p>
+            <a:pPr>
+              <a:spcAft>
+                <a:spcPts val="600"/>
+              </a:spcAft>
+              <a:defRPr sz="1600">
+                <a:solidFill>
+                  <a:srgbClr val="264653"/>
+                </a:solidFill>
+              </a:defRPr>
+            </a:pPr>
+            <a:r>
+              <a:t>• Always anchor the sign to a gravity-true reference: GPS altitude is ideal (we proved it flips the wrong Robinson-uphill sign to the correct +16.3°).</a:t>
+            </a:r>
+          </a:p>
+          <a:p>
+            <a:pPr>
+              <a:spcAft>
+                <a:spcPts val="600"/>
+              </a:spcAft>
+              <a:defRPr sz="1600">
+                <a:solidFill>
+                  <a:srgbClr val="264653"/>
+                </a:solidFill>
+              </a:defRPr>
+            </a:pPr>
+            <a:r>
+              <a:t>• Capture GPS/flight-log with every dataset — without it, the sign can only be taken from the known flight label, which we can't independently verify (e.g. Robinson downhill).</a:t>
+            </a:r>
+          </a:p>
+          <a:p>
+            <a:pPr>
+              <a:spcAft>
+                <a:spcPts val="600"/>
+              </a:spcAft>
+              <a:defRPr sz="1600">
+                <a:solidFill>
+                  <a:srgbClr val="264653"/>
+                </a:solidFill>
+              </a:defRPr>
+            </a:pPr>
+            <a:r>
+              <a:t>• Reliability tracks R²: trust the magnitude when R² is high; treat near-zero R² as 'no signal', not 'flat ground'.</a:t>
+            </a:r>
+          </a:p>
+          <a:p>
+            <a:pPr>
+              <a:spcAft>
+                <a:spcPts val="600"/>
+              </a:spcAft>
+              <a:defRPr sz="1600">
+                <a:solidFill>
+                  <a:srgbClr val="264653"/>
+                </a:solidFill>
+              </a:defRPr>
+            </a:pPr>
+            <a:r>
+              <a:t>• Per-segment slopes are noisy and can spike — read them as a profile, not point values; use all images for the overall fit.</a:t>
+            </a:r>
+          </a:p>
+          <a:p>
+            <a:pPr>
+              <a:spcAft>
+                <a:spcPts val="600"/>
+              </a:spcAft>
+              <a:defRPr sz="1600">
+                <a:solidFill>
+                  <a:srgbClr val="264653"/>
+                </a:solidFill>
+              </a:defRPr>
+            </a:pPr>
+            <a:r>
+              <a:t>• Prefer flights with vertical parallax (terrain-following / oblique) over level passes.</a:t>
+            </a:r>
+          </a:p>
+        </p:txBody>
+      </p:sp>
+    </p:spTree>
+  </p:cSld>
+  <p:clrMapOvr>
+    <a:masterClrMapping/>
+  </p:clrMapOvr>
+</p:sld>
+</file>
+
+<file path=ppt/slides/slide17.xml><?xml version="1.0" encoding="utf-8"?>
+<p:sld xmlns:a="http://schemas.openxmlformats.org/drawingml/2006/main" xmlns:r="http://schemas.openxmlformats.org/officeDocument/2006/relationships" xmlns:p="http://schemas.openxmlformats.org/presentationml/2006/main">
+  <p:cSld>
+    <p:spTree>
+      <p:nvGrpSpPr>
+        <p:cNvPr id="1" name=""/>
+        <p:cNvGrpSpPr/>
+        <p:nvPr/>
+      </p:nvGrpSpPr>
+      <p:grpSpPr>
+        <a:xfrm>
+          <a:off x="0" y="0"/>
+          <a:ext cx="0" cy="0"/>
+          <a:chOff x="0" y="0"/>
+          <a:chExt cx="0" cy="0"/>
+        </a:xfrm>
+      </p:grpSpPr>
+      <p:sp>
+        <p:nvSpPr>
+          <p:cNvPr id="2" name="Rectangle 1"/>
+          <p:cNvSpPr/>
+          <p:nvPr/>
+        </p:nvSpPr>
+        <p:spPr>
+          <a:xfrm>
+            <a:off x="0" y="0"/>
+            <a:ext cx="12191695" cy="1051560"/>
+          </a:xfrm>
+          <a:prstGeom prst="rect">
+            <a:avLst/>
+          </a:prstGeom>
+          <a:solidFill>
+            <a:srgbClr val="264653"/>
+          </a:solidFill>
+          <a:ln>
+            <a:noFill/>
+          </a:ln>
+          <a:effectLst/>
+        </p:spPr>
+        <p:style>
+          <a:lnRef idx="1">
+            <a:schemeClr val="accent1"/>
+          </a:lnRef>
+          <a:fillRef idx="3">
+            <a:schemeClr val="accent1"/>
+          </a:fillRef>
+          <a:effectRef idx="2">
+            <a:schemeClr val="accent1"/>
+          </a:effectRef>
+          <a:fontRef idx="minor">
+            <a:schemeClr val="lt1"/>
+          </a:fontRef>
+        </p:style>
+        <p:txBody>
+          <a:bodyPr rtlCol="0" anchor="ctr"/>
+          <a:lstStyle/>
+          <a:p>
+            <a:pPr algn="ctr"/>
+            <a:endParaRPr/>
+          </a:p>
+        </p:txBody>
+      </p:sp>
+      <p:sp>
+        <p:nvSpPr>
+          <p:cNvPr id="3" name="TextBox 2"/>
+          <p:cNvSpPr txBox="1"/>
+          <p:nvPr/>
+        </p:nvSpPr>
+        <p:spPr>
+          <a:xfrm>
+            <a:off x="457200" y="164592"/>
+            <a:ext cx="11247120" cy="822960"/>
+          </a:xfrm>
+          <a:prstGeom prst="rect">
+            <a:avLst/>
+          </a:prstGeom>
+          <a:noFill/>
+        </p:spPr>
+        <p:txBody>
+          <a:bodyPr wrap="square">
+            <a:spAutoFit/>
+          </a:bodyPr>
+          <a:lstStyle/>
+          <a:p>
+            <a:pPr>
+              <a:defRPr sz="3000" b="1">
+                <a:solidFill>
+                  <a:srgbClr val="FFFFFF"/>
+                </a:solidFill>
+              </a:defRPr>
+            </a:pPr>
+            <a:r>
+              <a:t>Files &amp; how to reproduce</a:t>
+            </a:r>
+          </a:p>
+        </p:txBody>
+      </p:sp>
+      <p:sp>
+        <p:nvSpPr>
+          <p:cNvPr id="4" name="TextBox 3"/>
+          <p:cNvSpPr txBox="1"/>
+          <p:nvPr/>
+        </p:nvSpPr>
+        <p:spPr>
+          <a:xfrm>
+            <a:off x="640080" y="1371600"/>
+            <a:ext cx="10881360" cy="4754880"/>
+          </a:xfrm>
+          <a:prstGeom prst="rect">
+            <a:avLst/>
+          </a:prstGeom>
+          <a:noFill/>
+        </p:spPr>
+        <p:txBody>
+          <a:bodyPr wrap="square">
+            <a:spAutoFit/>
+          </a:bodyPr>
+          <a:lstStyle/>
+          <a:p>
+            <a:pPr>
+              <a:spcAft>
+                <a:spcPts val="600"/>
+              </a:spcAft>
+              <a:defRPr sz="1700">
+                <a:solidFill>
+                  <a:srgbClr val="264653"/>
+                </a:solidFill>
+              </a:defRPr>
+            </a:pPr>
+            <a:r>
+              <a:t>• method1_slope.py — Method 1 (all-frames, signed, image-order, adaptive ground-search radius) + plot helpers</a:t>
+            </a:r>
+          </a:p>
+          <a:p>
+            <a:pPr>
+              <a:spcAft>
+                <a:spcPts val="600"/>
+              </a:spcAft>
+              <a:defRPr sz="1700">
+                <a:solidFill>
+                  <a:srgbClr val="264653"/>
+                </a:solidFill>
+              </a:defRPr>
+            </a:pPr>
+            <a:r>
+              <a:t>• gps_anchor.py — reads EXIF GPS, computes the gravity-true track slope; the sign anchor</a:t>
+            </a:r>
+          </a:p>
+          <a:p>
+            <a:pPr>
+              <a:spcAft>
+                <a:spcPts val="600"/>
+              </a:spcAft>
+              <a:defRPr sz="1700">
+                <a:solidFill>
+                  <a:srgbClr val="264653"/>
+                </a:solidFill>
+              </a:defRPr>
+            </a:pPr>
+            <a:r>
+              <a:t>• run_robinson.py — A100: reconstruct with VGGT (or --from-glb to skip GPU), then Method 1 + GPS anchor</a:t>
+            </a:r>
+          </a:p>
+          <a:p>
+            <a:pPr>
+              <a:spcAft>
+                <a:spcPts val="600"/>
+              </a:spcAft>
+              <a:defRPr sz="1700">
+                <a:solidFill>
+                  <a:srgbClr val="264653"/>
+                </a:solidFill>
+              </a:defRPr>
+            </a:pPr>
+            <a:r>
+              <a:t>• run_method1_existing.py — Method 1 on the earlier GLBs → results/ plots + summary.json</a:t>
+            </a:r>
+          </a:p>
+          <a:p>
+            <a:pPr>
+              <a:spcAft>
+                <a:spcPts val="600"/>
+              </a:spcAft>
+              <a:defRPr sz="1700">
+                <a:solidFill>
+                  <a:srgbClr val="264653"/>
+                </a:solidFill>
+              </a:defRPr>
+            </a:pPr>
+            <a:r>
+              <a:t>• build_slides.py — regenerates this deck from results/</a:t>
+            </a:r>
+          </a:p>
+          <a:p>
+            <a:pPr>
+              <a:spcAft>
+                <a:spcPts val="600"/>
+              </a:spcAft>
+              <a:defRPr sz="1700">
+                <a:solidFill>
+                  <a:srgbClr val="264653"/>
+                </a:solidFill>
+              </a:defRPr>
+            </a:pPr>
+            <a:r>
+              <a:t>• Re-run order:  (A100) run_robinson.py [--from-glb]  →  build_slides.py</a:t>
+            </a:r>
+          </a:p>
+        </p:txBody>
+      </p:sp>
+    </p:spTree>
+  </p:cSld>
+  <p:clrMapOvr>
+    <a:masterClrMapping/>
+  </p:clrMapOvr>
+</p:sld>
+</file>
+
+<file path=ppt/slides/slide2.xml><?xml version="1.0" encoding="utf-8"?>
+<p:sld xmlns:a="http://schemas.openxmlformats.org/drawingml/2006/main" xmlns:r="http://schemas.openxmlformats.org/officeDocument/2006/relationships" xmlns:p="http://schemas.openxmlformats.org/presentationml/2006/main">
+  <p:cSld>
+    <p:spTree>
+      <p:nvGrpSpPr>
+        <p:cNvPr id="1" name=""/>
+        <p:cNvGrpSpPr/>
+        <p:nvPr/>
+      </p:nvGrpSpPr>
+      <p:grpSpPr>
+        <a:xfrm>
+          <a:off x="0" y="0"/>
+          <a:ext cx="0" cy="0"/>
+          <a:chOff x="0" y="0"/>
+          <a:chExt cx="0" cy="0"/>
+        </a:xfrm>
+      </p:grpSpPr>
+      <p:sp>
+        <p:nvSpPr>
+          <p:cNvPr id="2" name="Rectangle 1"/>
+          <p:cNvSpPr/>
+          <p:nvPr/>
+        </p:nvSpPr>
+        <p:spPr>
+          <a:xfrm>
+            <a:off x="0" y="0"/>
+            <a:ext cx="12191695" cy="1051560"/>
+          </a:xfrm>
+          <a:prstGeom prst="rect">
+            <a:avLst/>
+          </a:prstGeom>
+          <a:solidFill>
+            <a:srgbClr val="264653"/>
+          </a:solidFill>
+          <a:ln>
+            <a:noFill/>
+          </a:ln>
+          <a:effectLst/>
+        </p:spPr>
+        <p:style>
+          <a:lnRef idx="1">
+            <a:schemeClr val="accent1"/>
+          </a:lnRef>
+          <a:fillRef idx="3">
+            <a:schemeClr val="accent1"/>
+          </a:fillRef>
+          <a:effectRef idx="2">
+            <a:schemeClr val="accent1"/>
+          </a:effectRef>
+          <a:fontRef idx="minor">
+            <a:schemeClr val="lt1"/>
+          </a:fontRef>
+        </p:style>
+        <p:txBody>
+          <a:bodyPr rtlCol="0" anchor="ctr"/>
+          <a:lstStyle/>
+          <a:p>
+            <a:pPr algn="ctr"/>
+            <a:endParaRPr/>
+          </a:p>
+        </p:txBody>
+      </p:sp>
+      <p:sp>
+        <p:nvSpPr>
+          <p:cNvPr id="3" name="TextBox 2"/>
+          <p:cNvSpPr txBox="1"/>
+          <p:nvPr/>
+        </p:nvSpPr>
+        <p:spPr>
+          <a:xfrm>
+            <a:off x="457200" y="164592"/>
+            <a:ext cx="11247120" cy="822960"/>
+          </a:xfrm>
+          <a:prstGeom prst="rect">
+            <a:avLst/>
+          </a:prstGeom>
+          <a:noFill/>
+        </p:spPr>
+        <p:txBody>
+          <a:bodyPr wrap="square">
+            <a:spAutoFit/>
+          </a:bodyPr>
+          <a:lstStyle/>
+          <a:p>
+            <a:pPr>
+              <a:defRPr sz="3000" b="1">
+                <a:solidFill>
+                  <a:srgbClr val="FFFFFF"/>
+                </a:solidFill>
+              </a:defRPr>
+            </a:pPr>
+            <a:r>
+              <a:t>What was asked, and the short answer</a:t>
+            </a:r>
+          </a:p>
+        </p:txBody>
+      </p:sp>
+      <p:sp>
+        <p:nvSpPr>
+          <p:cNvPr id="4" name="TextBox 3"/>
+          <p:cNvSpPr txBox="1"/>
+          <p:nvPr/>
+        </p:nvSpPr>
+        <p:spPr>
+          <a:xfrm>
+            <a:off x="548640" y="1280160"/>
+            <a:ext cx="5577840" cy="5120640"/>
+          </a:xfrm>
+          <a:prstGeom prst="rect">
+            <a:avLst/>
+          </a:prstGeom>
+          <a:noFill/>
+        </p:spPr>
+        <p:txBody>
+          <a:bodyPr wrap="square">
+            <a:spAutoFit/>
+          </a:bodyPr>
+          <a:lstStyle/>
+          <a:p>
+            <a:pPr>
+              <a:spcAft>
+                <a:spcPts val="600"/>
+              </a:spcAft>
+              <a:defRPr sz="1700">
+                <a:solidFill>
+                  <a:srgbClr val="264653"/>
+                </a:solidFill>
+              </a:defRPr>
+            </a:pPr>
+            <a:r>
+              <a:t>• The request</a:t>
+            </a:r>
+          </a:p>
+          <a:p>
+            <a:pPr lvl="1">
+              <a:spcAft>
+                <a:spcPts val="600"/>
+              </a:spcAft>
+              <a:defRPr sz="1500">
+                <a:solidFill>
+                  <a:srgbClr val="555555"/>
+                </a:solidFill>
+              </a:defRPr>
+            </a:pPr>
+            <a:r>
+              <a:t>– Apply Method 1 to the dataset used by Method 2</a:t>
+            </a:r>
+          </a:p>
+          <a:p>
+            <a:pPr lvl="1">
+              <a:spcAft>
+                <a:spcPts val="600"/>
+              </a:spcAft>
+              <a:defRPr sz="1500">
+                <a:solidFill>
+                  <a:srgbClr val="555555"/>
+                </a:solidFill>
+              </a:defRPr>
+            </a:pPr>
+            <a:r>
+              <a:t>– Method 1 is more general — it doesn't assume fixed height above ground</a:t>
+            </a:r>
+          </a:p>
+          <a:p>
+            <a:pPr lvl="1">
+              <a:spcAft>
+                <a:spcPts val="600"/>
+              </a:spcAft>
+              <a:defRPr sz="1500">
+                <a:solidFill>
+                  <a:srgbClr val="555555"/>
+                </a:solidFill>
+              </a:defRPr>
+            </a:pPr>
+            <a:r>
+              <a:t>– Process the two Robinson datasets with Method 1</a:t>
+            </a:r>
+          </a:p>
+          <a:p>
+            <a:pPr lvl="1">
+              <a:spcAft>
+                <a:spcPts val="600"/>
+              </a:spcAft>
+              <a:defRPr sz="1500">
+                <a:solidFill>
+                  <a:srgbClr val="555555"/>
+                </a:solidFill>
+              </a:defRPr>
+            </a:pPr>
+            <a:r>
+              <a:t>– Report slope with a sign (+ uphill / − downhill); use all images</a:t>
+            </a:r>
+          </a:p>
+          <a:p>
+            <a:pPr lvl="1">
+              <a:spcAft>
+                <a:spcPts val="600"/>
+              </a:spcAft>
+              <a:defRPr sz="1500">
+                <a:solidFill>
+                  <a:srgbClr val="555555"/>
+                </a:solidFill>
+              </a:defRPr>
+            </a:pPr>
+            <a:r>
+              <a:t>– Per-segment slope plots; same plots for the previous dataset</a:t>
+            </a:r>
+          </a:p>
+          <a:p>
+            <a:pPr lvl="1">
+              <a:spcAft>
+                <a:spcPts val="600"/>
+              </a:spcAft>
+              <a:defRPr sz="1500">
+                <a:solidFill>
+                  <a:srgbClr val="555555"/>
+                </a:solidFill>
+              </a:defRPr>
+            </a:pPr>
+            <a:r>
+              <a:t>– Collect everything into a slide file</a:t>
+            </a:r>
+          </a:p>
+        </p:txBody>
+      </p:sp>
+      <p:sp>
+        <p:nvSpPr>
+          <p:cNvPr id="5" name="TextBox 4"/>
+          <p:cNvSpPr txBox="1"/>
+          <p:nvPr/>
+        </p:nvSpPr>
+        <p:spPr>
+          <a:xfrm>
+            <a:off x="6355080" y="1280160"/>
+            <a:ext cx="5303520" cy="5120640"/>
+          </a:xfrm>
+          <a:prstGeom prst="rect">
+            <a:avLst/>
+          </a:prstGeom>
+          <a:noFill/>
+        </p:spPr>
+        <p:txBody>
+          <a:bodyPr wrap="square">
+            <a:spAutoFit/>
+          </a:bodyPr>
+          <a:lstStyle/>
+          <a:p>
+            <a:pPr>
+              <a:spcAft>
+                <a:spcPts val="600"/>
+              </a:spcAft>
+              <a:defRPr sz="1700">
+                <a:solidFill>
+                  <a:srgbClr val="264653"/>
+                </a:solidFill>
+              </a:defRPr>
+            </a:pPr>
+            <a:r>
+              <a:t>• Short answer</a:t>
+            </a:r>
+          </a:p>
+          <a:p>
+            <a:pPr lvl="1">
+              <a:spcAft>
+                <a:spcPts val="600"/>
+              </a:spcAft>
+              <a:defRPr sz="1500">
+                <a:solidFill>
+                  <a:srgbClr val="555555"/>
+                </a:solidFill>
+              </a:defRPr>
+            </a:pPr>
+            <a:r>
+              <a:t>– Method 1 transfers to the Method-2 dataset and works well</a:t>
+            </a:r>
+          </a:p>
+          <a:p>
+            <a:pPr lvl="1">
+              <a:spcAft>
+                <a:spcPts val="600"/>
+              </a:spcAft>
+              <a:defRPr sz="1500">
+                <a:solidFill>
+                  <a:srgbClr val="555555"/>
+                </a:solidFill>
+              </a:defRPr>
+            </a:pPr>
+            <a:r>
+              <a:t>– Uphill: +3.7° (Method 2: +3.4°) — close agreement, R²=0.99</a:t>
+            </a:r>
+          </a:p>
+          <a:p>
+            <a:pPr lvl="1">
+              <a:spcAft>
+                <a:spcPts val="600"/>
+              </a:spcAft>
+              <a:defRPr sz="1500">
+                <a:solidFill>
+                  <a:srgbClr val="555555"/>
+                </a:solidFill>
+              </a:defRPr>
+            </a:pPr>
+            <a:r>
+              <a:t>– Downhill: −7.9° (Method 2: −4.8°) — right direction, steeper</a:t>
+            </a:r>
+          </a:p>
+          <a:p>
+            <a:pPr lvl="1">
+              <a:spcAft>
+                <a:spcPts val="600"/>
+              </a:spcAft>
+              <a:defRPr sz="1500">
+                <a:solidFill>
+                  <a:srgbClr val="555555"/>
+                </a:solidFill>
+              </a:defRPr>
+            </a:pPr>
+            <a:r>
+              <a:t>– Method 1 needs the reconstruction to capture vertical relief (terrain-following flights) — level flights rebuild flat</a:t>
+            </a:r>
+          </a:p>
+          <a:p>
+            <a:pPr lvl="1">
+              <a:spcAft>
+                <a:spcPts val="600"/>
+              </a:spcAft>
+              <a:defRPr sz="1500">
+                <a:solidFill>
+                  <a:srgbClr val="555555"/>
+                </a:solidFill>
+              </a:defRPr>
+            </a:pPr>
+            <a:r>
+              <a:t>– Robinson uphill: +16.3° uphill (GPS-verified); downhill: −5.65° downhill</a:t>
+            </a:r>
+          </a:p>
+          <a:p>
+            <a:pPr lvl="1">
+              <a:spcAft>
+                <a:spcPts val="600"/>
+              </a:spcAft>
+              <a:defRPr sz="1500">
+                <a:solidFill>
+                  <a:srgbClr val="555555"/>
+                </a:solidFill>
+              </a:defRPr>
+            </a:pPr>
+            <a:r>
+              <a:t>– Sign finding: Method 1's up/down sign rides on VGGT's vertical axis, which is NOT gravity-locked — we now anchor the sign to GPS</a:t>
+            </a:r>
+          </a:p>
+        </p:txBody>
+      </p:sp>
+    </p:spTree>
+  </p:cSld>
+  <p:clrMapOvr>
+    <a:masterClrMapping/>
+  </p:clrMapOvr>
+</p:sld>
+</file>
+
+<file path=ppt/slides/slide3.xml><?xml version="1.0" encoding="utf-8"?>
+<p:sld xmlns:a="http://schemas.openxmlformats.org/drawingml/2006/main" xmlns:r="http://schemas.openxmlformats.org/officeDocument/2006/relationships" xmlns:p="http://schemas.openxmlformats.org/presentationml/2006/main">
+  <p:cSld>
+    <p:spTree>
+      <p:nvGrpSpPr>
+        <p:cNvPr id="1" name=""/>
+        <p:cNvGrpSpPr/>
+        <p:nvPr/>
+      </p:nvGrpSpPr>
+      <p:grpSpPr>
+        <a:xfrm>
+          <a:off x="0" y="0"/>
+          <a:ext cx="0" cy="0"/>
+          <a:chOff x="0" y="0"/>
+          <a:chExt cx="0" cy="0"/>
+        </a:xfrm>
+      </p:grpSpPr>
+      <p:sp>
+        <p:nvSpPr>
+          <p:cNvPr id="2" name="Rectangle 1"/>
+          <p:cNvSpPr/>
+          <p:nvPr/>
+        </p:nvSpPr>
+        <p:spPr>
+          <a:xfrm>
+            <a:off x="0" y="0"/>
+            <a:ext cx="12191695" cy="1051560"/>
+          </a:xfrm>
+          <a:prstGeom prst="rect">
+            <a:avLst/>
+          </a:prstGeom>
+          <a:solidFill>
+            <a:srgbClr val="264653"/>
+          </a:solidFill>
+          <a:ln>
+            <a:noFill/>
+          </a:ln>
+          <a:effectLst/>
+        </p:spPr>
+        <p:style>
+          <a:lnRef idx="1">
+            <a:schemeClr val="accent1"/>
+          </a:lnRef>
+          <a:fillRef idx="3">
+            <a:schemeClr val="accent1"/>
+          </a:fillRef>
+          <a:effectRef idx="2">
+            <a:schemeClr val="accent1"/>
+          </a:effectRef>
+          <a:fontRef idx="minor">
+            <a:schemeClr val="lt1"/>
+          </a:fontRef>
+        </p:style>
+        <p:txBody>
+          <a:bodyPr rtlCol="0" anchor="ctr"/>
+          <a:lstStyle/>
+          <a:p>
+            <a:pPr algn="ctr"/>
+            <a:endParaRPr/>
+          </a:p>
+        </p:txBody>
+      </p:sp>
+      <p:sp>
+        <p:nvSpPr>
+          <p:cNvPr id="3" name="TextBox 2"/>
+          <p:cNvSpPr txBox="1"/>
+          <p:nvPr/>
+        </p:nvSpPr>
+        <p:spPr>
+          <a:xfrm>
+            <a:off x="457200" y="164592"/>
+            <a:ext cx="11247120" cy="822960"/>
+          </a:xfrm>
+          <a:prstGeom prst="rect">
+            <a:avLst/>
+          </a:prstGeom>
+          <a:noFill/>
+        </p:spPr>
+        <p:txBody>
+          <a:bodyPr wrap="square">
+            <a:spAutoFit/>
+          </a:bodyPr>
+          <a:lstStyle/>
+          <a:p>
+            <a:pPr>
+              <a:defRPr sz="3000" b="1">
+                <a:solidFill>
+                  <a:srgbClr val="FFFFFF"/>
+                </a:solidFill>
+              </a:defRPr>
+            </a:pPr>
+            <a:r>
+              <a:t>How Method 1 works (ground-distance method)</a:t>
+            </a:r>
+          </a:p>
+        </p:txBody>
+      </p:sp>
+      <p:sp>
+        <p:nvSpPr>
+          <p:cNvPr id="4" name="TextBox 3"/>
+          <p:cNvSpPr txBox="1"/>
+          <p:nvPr/>
+        </p:nvSpPr>
+        <p:spPr>
+          <a:xfrm>
+            <a:off x="583541" y="1471765"/>
             <a:ext cx="5029200" cy="5120640"/>
           </a:xfrm>
           <a:prstGeom prst="rect">
@@ -4893,7 +6242,7 @@
 </file>
 
 <file path=ppt/slides/slide4.xml><?xml version="1.0" encoding="utf-8"?>
-<p:sld xmlns:a="http://schemas.openxmlformats.org/drawingml/2006/main" xmlns:p="http://schemas.openxmlformats.org/presentationml/2006/main" xmlns:r="http://schemas.openxmlformats.org/officeDocument/2006/relationships">
+<p:sld xmlns:a="http://schemas.openxmlformats.org/drawingml/2006/main" xmlns:r="http://schemas.openxmlformats.org/officeDocument/2006/relationships" xmlns:p="http://schemas.openxmlformats.org/presentationml/2006/main">
   <p:cSld>
     <p:spTree>
       <p:nvGrpSpPr>
@@ -4901,7 +6250,14 @@
         <p:cNvGrpSpPr/>
         <p:nvPr/>
       </p:nvGrpSpPr>
-      <p:grpSpPr/>
+      <p:grpSpPr>
+        <a:xfrm>
+          <a:off x="0" y="0"/>
+          <a:ext cx="0" cy="0"/>
+          <a:chOff x="0" y="0"/>
+          <a:chExt cx="0" cy="0"/>
+        </a:xfrm>
+      </p:grpSpPr>
       <p:sp>
         <p:nvSpPr>
           <p:cNvPr id="2" name="Rectangle 1"/>
@@ -4943,6 +6299,7 @@
           <a:lstStyle/>
           <a:p>
             <a:pPr algn="ctr"/>
+            <a:endParaRPr/>
           </a:p>
         </p:txBody>
       </p:sp>
@@ -5000,9 +6357,27 @@
                 <a:tableStyleId>{5C22544A-7EE6-4342-B048-85BDC9FD1C3A}</a:tableStyleId>
               </a:tblPr>
               <a:tblGrid>
-                <a:gridCol w="2468880"/>
-                <a:gridCol w="4297680"/>
-                <a:gridCol w="4297680"/>
+                <a:gridCol w="2468880">
+                  <a:extLst>
+                    <a:ext uri="{9D8B030D-6E8A-4147-A177-3AD203B41FA5}">
+                      <a16:colId xmlns:a16="http://schemas.microsoft.com/office/drawing/2014/main" val="20000"/>
+                    </a:ext>
+                  </a:extLst>
+                </a:gridCol>
+                <a:gridCol w="4297680">
+                  <a:extLst>
+                    <a:ext uri="{9D8B030D-6E8A-4147-A177-3AD203B41FA5}">
+                      <a16:colId xmlns:a16="http://schemas.microsoft.com/office/drawing/2014/main" val="20001"/>
+                    </a:ext>
+                  </a:extLst>
+                </a:gridCol>
+                <a:gridCol w="4297680">
+                  <a:extLst>
+                    <a:ext uri="{9D8B030D-6E8A-4147-A177-3AD203B41FA5}">
+                      <a16:colId xmlns:a16="http://schemas.microsoft.com/office/drawing/2014/main" val="20002"/>
+                    </a:ext>
+                  </a:extLst>
+                </a:gridCol>
               </a:tblGrid>
               <a:tr h="694944">
                 <a:tc>
@@ -5017,6 +6392,7 @@
                           </a:solidFill>
                         </a:defRPr>
                       </a:pPr>
+                      <a:endParaRPr/>
                     </a:p>
                   </a:txBody>
                   <a:tcPr>
@@ -5071,6 +6447,11 @@
                     </a:solidFill>
                   </a:tcPr>
                 </a:tc>
+                <a:extLst>
+                  <a:ext uri="{0D108BD9-81ED-4DB2-BD59-A6C34878D82A}">
+                    <a16:rowId xmlns:a16="http://schemas.microsoft.com/office/drawing/2014/main" val="10000"/>
+                  </a:ext>
+                </a:extLst>
               </a:tr>
               <a:tr h="694944">
                 <a:tc>
@@ -5142,6 +6523,11 @@
                     </a:solidFill>
                   </a:tcPr>
                 </a:tc>
+                <a:extLst>
+                  <a:ext uri="{0D108BD9-81ED-4DB2-BD59-A6C34878D82A}">
+                    <a16:rowId xmlns:a16="http://schemas.microsoft.com/office/drawing/2014/main" val="10001"/>
+                  </a:ext>
+                </a:extLst>
               </a:tr>
               <a:tr h="694944">
                 <a:tc>
@@ -5213,6 +6599,11 @@
                     </a:solidFill>
                   </a:tcPr>
                 </a:tc>
+                <a:extLst>
+                  <a:ext uri="{0D108BD9-81ED-4DB2-BD59-A6C34878D82A}">
+                    <a16:rowId xmlns:a16="http://schemas.microsoft.com/office/drawing/2014/main" val="10002"/>
+                  </a:ext>
+                </a:extLst>
               </a:tr>
               <a:tr h="694944">
                 <a:tc>
@@ -5284,6 +6675,11 @@
                     </a:solidFill>
                   </a:tcPr>
                 </a:tc>
+                <a:extLst>
+                  <a:ext uri="{0D108BD9-81ED-4DB2-BD59-A6C34878D82A}">
+                    <a16:rowId xmlns:a16="http://schemas.microsoft.com/office/drawing/2014/main" val="10003"/>
+                  </a:ext>
+                </a:extLst>
               </a:tr>
               <a:tr h="694944">
                 <a:tc>
@@ -5355,6 +6751,11 @@
                     </a:solidFill>
                   </a:tcPr>
                 </a:tc>
+                <a:extLst>
+                  <a:ext uri="{0D108BD9-81ED-4DB2-BD59-A6C34878D82A}">
+                    <a16:rowId xmlns:a16="http://schemas.microsoft.com/office/drawing/2014/main" val="10004"/>
+                  </a:ext>
+                </a:extLst>
               </a:tr>
             </a:tbl>
           </a:graphicData>
@@ -5407,7 +6808,7 @@
 </file>
 
 <file path=ppt/slides/slide5.xml><?xml version="1.0" encoding="utf-8"?>
-<p:sld xmlns:a="http://schemas.openxmlformats.org/drawingml/2006/main" xmlns:p="http://schemas.openxmlformats.org/presentationml/2006/main" xmlns:r="http://schemas.openxmlformats.org/officeDocument/2006/relationships">
+<p:sld xmlns:a="http://schemas.openxmlformats.org/drawingml/2006/main" xmlns:r="http://schemas.openxmlformats.org/officeDocument/2006/relationships" xmlns:p="http://schemas.openxmlformats.org/presentationml/2006/main">
   <p:cSld>
     <p:spTree>
       <p:nvGrpSpPr>
@@ -5415,7 +6816,14 @@
         <p:cNvGrpSpPr/>
         <p:nvPr/>
       </p:nvGrpSpPr>
-      <p:grpSpPr/>
+      <p:grpSpPr>
+        <a:xfrm>
+          <a:off x="0" y="0"/>
+          <a:ext cx="0" cy="0"/>
+          <a:chOff x="0" y="0"/>
+          <a:chExt cx="0" cy="0"/>
+        </a:xfrm>
+      </p:grpSpPr>
       <p:sp>
         <p:nvSpPr>
           <p:cNvPr id="2" name="Rectangle 1"/>
@@ -5457,6 +6865,7 @@
           <a:lstStyle/>
           <a:p>
             <a:pPr algn="ctr"/>
+            <a:endParaRPr/>
           </a:p>
         </p:txBody>
       </p:sp>
@@ -5617,7 +7026,7 @@
 </file>
 
 <file path=ppt/slides/slide6.xml><?xml version="1.0" encoding="utf-8"?>
-<p:sld xmlns:a="http://schemas.openxmlformats.org/drawingml/2006/main" xmlns:p="http://schemas.openxmlformats.org/presentationml/2006/main" xmlns:r="http://schemas.openxmlformats.org/officeDocument/2006/relationships">
+<p:sld xmlns:a="http://schemas.openxmlformats.org/drawingml/2006/main" xmlns:r="http://schemas.openxmlformats.org/officeDocument/2006/relationships" xmlns:p="http://schemas.openxmlformats.org/presentationml/2006/main">
   <p:cSld>
     <p:spTree>
       <p:nvGrpSpPr>
@@ -5625,7 +7034,14 @@
         <p:cNvGrpSpPr/>
         <p:nvPr/>
       </p:nvGrpSpPr>
-      <p:grpSpPr/>
+      <p:grpSpPr>
+        <a:xfrm>
+          <a:off x="0" y="0"/>
+          <a:ext cx="0" cy="0"/>
+          <a:chOff x="0" y="0"/>
+          <a:chExt cx="0" cy="0"/>
+        </a:xfrm>
+      </p:grpSpPr>
       <p:sp>
         <p:nvSpPr>
           <p:cNvPr id="2" name="Rectangle 1"/>
@@ -5667,6 +7083,7 @@
           <a:lstStyle/>
           <a:p>
             <a:pPr algn="ctr"/>
+            <a:endParaRPr/>
           </a:p>
         </p:txBody>
       </p:sp>
@@ -5724,11 +7141,41 @@
                 <a:tableStyleId>{5C22544A-7EE6-4342-B048-85BDC9FD1C3A}</a:tableStyleId>
               </a:tblPr>
               <a:tblGrid>
-                <a:gridCol w="3749039"/>
-                <a:gridCol w="1737360"/>
-                <a:gridCol w="1280160"/>
-                <a:gridCol w="1737360"/>
-                <a:gridCol w="2560320"/>
+                <a:gridCol w="3749039">
+                  <a:extLst>
+                    <a:ext uri="{9D8B030D-6E8A-4147-A177-3AD203B41FA5}">
+                      <a16:colId xmlns:a16="http://schemas.microsoft.com/office/drawing/2014/main" val="20000"/>
+                    </a:ext>
+                  </a:extLst>
+                </a:gridCol>
+                <a:gridCol w="1737360">
+                  <a:extLst>
+                    <a:ext uri="{9D8B030D-6E8A-4147-A177-3AD203B41FA5}">
+                      <a16:colId xmlns:a16="http://schemas.microsoft.com/office/drawing/2014/main" val="20001"/>
+                    </a:ext>
+                  </a:extLst>
+                </a:gridCol>
+                <a:gridCol w="1280160">
+                  <a:extLst>
+                    <a:ext uri="{9D8B030D-6E8A-4147-A177-3AD203B41FA5}">
+                      <a16:colId xmlns:a16="http://schemas.microsoft.com/office/drawing/2014/main" val="20002"/>
+                    </a:ext>
+                  </a:extLst>
+                </a:gridCol>
+                <a:gridCol w="1737360">
+                  <a:extLst>
+                    <a:ext uri="{9D8B030D-6E8A-4147-A177-3AD203B41FA5}">
+                      <a16:colId xmlns:a16="http://schemas.microsoft.com/office/drawing/2014/main" val="20003"/>
+                    </a:ext>
+                  </a:extLst>
+                </a:gridCol>
+                <a:gridCol w="2560320">
+                  <a:extLst>
+                    <a:ext uri="{9D8B030D-6E8A-4147-A177-3AD203B41FA5}">
+                      <a16:colId xmlns:a16="http://schemas.microsoft.com/office/drawing/2014/main" val="20004"/>
+                    </a:ext>
+                  </a:extLst>
+                </a:gridCol>
               </a:tblGrid>
               <a:tr h="518160">
                 <a:tc>
@@ -5846,6 +7293,11 @@
                     </a:solidFill>
                   </a:tcPr>
                 </a:tc>
+                <a:extLst>
+                  <a:ext uri="{0D108BD9-81ED-4DB2-BD59-A6C34878D82A}">
+                    <a16:rowId xmlns:a16="http://schemas.microsoft.com/office/drawing/2014/main" val="10000"/>
+                  </a:ext>
+                </a:extLst>
               </a:tr>
               <a:tr h="518160">
                 <a:tc>
@@ -5963,6 +7415,11 @@
                     </a:solidFill>
                   </a:tcPr>
                 </a:tc>
+                <a:extLst>
+                  <a:ext uri="{0D108BD9-81ED-4DB2-BD59-A6C34878D82A}">
+                    <a16:rowId xmlns:a16="http://schemas.microsoft.com/office/drawing/2014/main" val="10001"/>
+                  </a:ext>
+                </a:extLst>
               </a:tr>
               <a:tr h="518160">
                 <a:tc>
@@ -6080,6 +7537,11 @@
                     </a:solidFill>
                   </a:tcPr>
                 </a:tc>
+                <a:extLst>
+                  <a:ext uri="{0D108BD9-81ED-4DB2-BD59-A6C34878D82A}">
+                    <a16:rowId xmlns:a16="http://schemas.microsoft.com/office/drawing/2014/main" val="10002"/>
+                  </a:ext>
+                </a:extLst>
               </a:tr>
               <a:tr h="518160">
                 <a:tc>
@@ -6197,6 +7659,11 @@
                     </a:solidFill>
                   </a:tcPr>
                 </a:tc>
+                <a:extLst>
+                  <a:ext uri="{0D108BD9-81ED-4DB2-BD59-A6C34878D82A}">
+                    <a16:rowId xmlns:a16="http://schemas.microsoft.com/office/drawing/2014/main" val="10003"/>
+                  </a:ext>
+                </a:extLst>
               </a:tr>
               <a:tr h="518160">
                 <a:tc>
@@ -6314,6 +7781,11 @@
                     </a:solidFill>
                   </a:tcPr>
                 </a:tc>
+                <a:extLst>
+                  <a:ext uri="{0D108BD9-81ED-4DB2-BD59-A6C34878D82A}">
+                    <a16:rowId xmlns:a16="http://schemas.microsoft.com/office/drawing/2014/main" val="10004"/>
+                  </a:ext>
+                </a:extLst>
               </a:tr>
               <a:tr h="518160">
                 <a:tc>
@@ -6431,6 +7903,11 @@
                     </a:solidFill>
                   </a:tcPr>
                 </a:tc>
+                <a:extLst>
+                  <a:ext uri="{0D108BD9-81ED-4DB2-BD59-A6C34878D82A}">
+                    <a16:rowId xmlns:a16="http://schemas.microsoft.com/office/drawing/2014/main" val="10005"/>
+                  </a:ext>
+                </a:extLst>
               </a:tr>
             </a:tbl>
           </a:graphicData>
@@ -6480,7 +7957,7 @@
 </file>
 
 <file path=ppt/slides/slide7.xml><?xml version="1.0" encoding="utf-8"?>
-<p:sld xmlns:a="http://schemas.openxmlformats.org/drawingml/2006/main" xmlns:p="http://schemas.openxmlformats.org/presentationml/2006/main" xmlns:r="http://schemas.openxmlformats.org/officeDocument/2006/relationships">
+<p:sld xmlns:a="http://schemas.openxmlformats.org/drawingml/2006/main" xmlns:r="http://schemas.openxmlformats.org/officeDocument/2006/relationships" xmlns:p="http://schemas.openxmlformats.org/presentationml/2006/main">
   <p:cSld>
     <p:spTree>
       <p:nvGrpSpPr>
@@ -6488,7 +7965,14 @@
         <p:cNvGrpSpPr/>
         <p:nvPr/>
       </p:nvGrpSpPr>
-      <p:grpSpPr/>
+      <p:grpSpPr>
+        <a:xfrm>
+          <a:off x="0" y="0"/>
+          <a:ext cx="0" cy="0"/>
+          <a:chOff x="0" y="0"/>
+          <a:chExt cx="0" cy="0"/>
+        </a:xfrm>
+      </p:grpSpPr>
       <p:sp>
         <p:nvSpPr>
           <p:cNvPr id="2" name="Rectangle 1"/>
@@ -6530,6 +8014,7 @@
           <a:lstStyle/>
           <a:p>
             <a:pPr algn="ctr"/>
+            <a:endParaRPr/>
           </a:p>
         </p:txBody>
       </p:sp>
@@ -6728,7 +8213,7 @@
 </file>
 
 <file path=ppt/slides/slide8.xml><?xml version="1.0" encoding="utf-8"?>
-<p:sld xmlns:a="http://schemas.openxmlformats.org/drawingml/2006/main" xmlns:p="http://schemas.openxmlformats.org/presentationml/2006/main" xmlns:r="http://schemas.openxmlformats.org/officeDocument/2006/relationships">
+<p:sld xmlns:a="http://schemas.openxmlformats.org/drawingml/2006/main" xmlns:r="http://schemas.openxmlformats.org/officeDocument/2006/relationships" xmlns:p="http://schemas.openxmlformats.org/presentationml/2006/main">
   <p:cSld>
     <p:spTree>
       <p:nvGrpSpPr>
@@ -6736,7 +8221,14 @@
         <p:cNvGrpSpPr/>
         <p:nvPr/>
       </p:nvGrpSpPr>
-      <p:grpSpPr/>
+      <p:grpSpPr>
+        <a:xfrm>
+          <a:off x="0" y="0"/>
+          <a:ext cx="0" cy="0"/>
+          <a:chOff x="0" y="0"/>
+          <a:chExt cx="0" cy="0"/>
+        </a:xfrm>
+      </p:grpSpPr>
       <p:sp>
         <p:nvSpPr>
           <p:cNvPr id="2" name="Rectangle 1"/>
@@ -6778,6 +8270,7 @@
           <a:lstStyle/>
           <a:p>
             <a:pPr algn="ctr"/>
+            <a:endParaRPr/>
           </a:p>
         </p:txBody>
       </p:sp>
@@ -6908,7 +8401,7 @@
 </file>
 
 <file path=ppt/slides/slide9.xml><?xml version="1.0" encoding="utf-8"?>
-<p:sld xmlns:a="http://schemas.openxmlformats.org/drawingml/2006/main" xmlns:p="http://schemas.openxmlformats.org/presentationml/2006/main" xmlns:r="http://schemas.openxmlformats.org/officeDocument/2006/relationships">
+<p:sld xmlns:a="http://schemas.openxmlformats.org/drawingml/2006/main" xmlns:r="http://schemas.openxmlformats.org/officeDocument/2006/relationships" xmlns:p="http://schemas.openxmlformats.org/presentationml/2006/main">
   <p:cSld>
     <p:spTree>
       <p:nvGrpSpPr>
@@ -6916,7 +8409,14 @@
         <p:cNvGrpSpPr/>
         <p:nvPr/>
       </p:nvGrpSpPr>
-      <p:grpSpPr/>
+      <p:grpSpPr>
+        <a:xfrm>
+          <a:off x="0" y="0"/>
+          <a:ext cx="0" cy="0"/>
+          <a:chOff x="0" y="0"/>
+          <a:chExt cx="0" cy="0"/>
+        </a:xfrm>
+      </p:grpSpPr>
       <p:sp>
         <p:nvSpPr>
           <p:cNvPr id="2" name="Rectangle 1"/>
@@ -6958,6 +8458,7 @@
           <a:lstStyle/>
           <a:p>
             <a:pPr algn="ctr"/>
+            <a:endParaRPr/>
           </a:p>
         </p:txBody>
       </p:sp>
